--- a/rubrikEAS.pptx
+++ b/rubrikEAS.pptx
@@ -136,7 +136,7 @@
       </p:grpSpPr>
       <p:sp>
         <p:nvSpPr>
-          <p:cNvPr id="443592395" name="Header Placeholder 1"/>
+          <p:cNvPr id="2118166498" name="Header Placeholder 1"/>
           <p:cNvSpPr>
             <a:spLocks noGrp="1"/>
           </p:cNvSpPr>
@@ -170,7 +170,7 @@
       </p:sp>
       <p:sp>
         <p:nvSpPr>
-          <p:cNvPr id="276222750" name="Date Placeholder 2"/>
+          <p:cNvPr id="1965451936" name="Date Placeholder 2"/>
           <p:cNvSpPr>
             <a:spLocks noGrp="1"/>
           </p:cNvSpPr>
@@ -208,7 +208,7 @@
       </p:sp>
       <p:sp>
         <p:nvSpPr>
-          <p:cNvPr id="361720979" name="Slide Image Placeholder 3"/>
+          <p:cNvPr id="926389279" name="Slide Image Placeholder 3"/>
           <p:cNvSpPr>
             <a:spLocks noChangeAspect="1" noGrp="1" noRot="1"/>
           </p:cNvSpPr>
@@ -244,7 +244,7 @@
       </p:sp>
       <p:sp>
         <p:nvSpPr>
-          <p:cNvPr id="1049207010" name="Notes Placeholder 4"/>
+          <p:cNvPr id="1451787987" name="Notes Placeholder 4"/>
           <p:cNvSpPr>
             <a:spLocks noGrp="1"/>
           </p:cNvSpPr>
@@ -318,7 +318,7 @@
       </p:sp>
       <p:sp>
         <p:nvSpPr>
-          <p:cNvPr id="1117114107" name="Footer Placeholder 5"/>
+          <p:cNvPr id="315486897" name="Footer Placeholder 5"/>
           <p:cNvSpPr>
             <a:spLocks noGrp="1"/>
           </p:cNvSpPr>
@@ -352,7 +352,7 @@
       </p:sp>
       <p:sp>
         <p:nvSpPr>
-          <p:cNvPr id="739079786" name="Slide Number Placeholder 6"/>
+          <p:cNvPr id="945682516" name="Slide Number Placeholder 6"/>
           <p:cNvSpPr>
             <a:spLocks noGrp="1"/>
           </p:cNvSpPr>
@@ -505,7 +505,7 @@
       </p:grpSpPr>
       <p:sp>
         <p:nvSpPr>
-          <p:cNvPr id="505059494" name="Slide Image Placeholder 1"/>
+          <p:cNvPr id="1314718399" name="Slide Image Placeholder 1"/>
           <p:cNvSpPr>
             <a:spLocks noChangeAspect="1" noGrp="1" noRot="1"/>
           </p:cNvSpPr>
@@ -522,7 +522,7 @@
       </p:sp>
       <p:sp>
         <p:nvSpPr>
-          <p:cNvPr id="446039130" name="Notes Placeholder 2"/>
+          <p:cNvPr id="1813321671" name="Notes Placeholder 2"/>
           <p:cNvSpPr>
             <a:spLocks noGrp="1"/>
           </p:cNvSpPr>
@@ -547,7 +547,7 @@
       </p:sp>
       <p:sp>
         <p:nvSpPr>
-          <p:cNvPr id="1322474809" name="Slide Number Placeholder 3"/>
+          <p:cNvPr id="1226931591" name="Slide Number Placeholder 3"/>
           <p:cNvSpPr>
             <a:spLocks noGrp="1"/>
           </p:cNvSpPr>
@@ -768,7 +768,7 @@
       </p:grpSpPr>
       <p:sp>
         <p:nvSpPr>
-          <p:cNvPr id="1882061138" name="Shape 1059"/>
+          <p:cNvPr id="1307909018" name="Shape 1059"/>
           <p:cNvSpPr>
             <a:spLocks noChangeArrowheads="1" noGrp="1"/>
           </p:cNvSpPr>
@@ -891,7 +891,7 @@
       </p:sp>
       <p:sp>
         <p:nvSpPr>
-          <p:cNvPr id="2018274578" name="Shape 1060"/>
+          <p:cNvPr id="1981563902" name="Shape 1060"/>
           <p:cNvSpPr>
             <a:spLocks noChangeArrowheads="1" noGrp="1"/>
           </p:cNvSpPr>
@@ -982,7 +982,7 @@
       </p:sp>
       <p:sp>
         <p:nvSpPr>
-          <p:cNvPr id="1192014505" name="Shape 1061"/>
+          <p:cNvPr id="953698056" name="Shape 1061"/>
           <p:cNvSpPr>
             <a:spLocks noChangeArrowheads="1" noGrp="1"/>
           </p:cNvSpPr>
@@ -1068,7 +1068,7 @@
       </p:sp>
       <p:sp>
         <p:nvSpPr>
-          <p:cNvPr id="2021216764" name="Shape 1062"/>
+          <p:cNvPr id="1457424857" name="Shape 1062"/>
           <p:cNvSpPr>
             <a:spLocks noChangeArrowheads="1" noGrp="1"/>
           </p:cNvSpPr>
@@ -1146,7 +1146,7 @@
       </p:sp>
       <p:sp>
         <p:nvSpPr>
-          <p:cNvPr id="840537014" name="Shape 1063"/>
+          <p:cNvPr id="2106110876" name="Shape 1063"/>
           <p:cNvSpPr>
             <a:spLocks noChangeArrowheads="1" noGrp="1"/>
           </p:cNvSpPr>
@@ -1224,7 +1224,7 @@
       </p:sp>
       <p:sp>
         <p:nvSpPr>
-          <p:cNvPr id="656733038" name="Subtitle 2"/>
+          <p:cNvPr id="818674093" name="Subtitle 2"/>
           <p:cNvSpPr>
             <a:spLocks noGrp="1"/>
           </p:cNvSpPr>
@@ -1347,7 +1347,7 @@
       </p:sp>
       <p:sp>
         <p:nvSpPr>
-          <p:cNvPr id="338687968" name="Date Placeholder 3"/>
+          <p:cNvPr id="5636395" name="Date Placeholder 3"/>
           <p:cNvSpPr>
             <a:spLocks noGrp="1"/>
           </p:cNvSpPr>
@@ -1373,7 +1373,7 @@
       </p:sp>
       <p:sp>
         <p:nvSpPr>
-          <p:cNvPr id="1036487063" name="Footer Placeholder 4"/>
+          <p:cNvPr id="1850344507" name="Footer Placeholder 4"/>
           <p:cNvSpPr>
             <a:spLocks noGrp="1"/>
           </p:cNvSpPr>
@@ -1395,7 +1395,7 @@
       </p:sp>
       <p:sp>
         <p:nvSpPr>
-          <p:cNvPr id="1099211788" name="Slide Number Placeholder 5"/>
+          <p:cNvPr id="603916600" name="Slide Number Placeholder 5"/>
           <p:cNvSpPr>
             <a:spLocks noGrp="1"/>
           </p:cNvSpPr>
@@ -1421,7 +1421,7 @@
       </p:sp>
       <p:sp>
         <p:nvSpPr>
-          <p:cNvPr id="1507608841" name="Title 6"/>
+          <p:cNvPr id="882359836" name="Title 6"/>
           <p:cNvSpPr>
             <a:spLocks noGrp="1"/>
           </p:cNvSpPr>
@@ -1481,7 +1481,7 @@
       </p:grpSpPr>
       <p:sp>
         <p:nvSpPr>
-          <p:cNvPr id="776184912" name="Title 1"/>
+          <p:cNvPr id="975482753" name="Title 1"/>
           <p:cNvSpPr>
             <a:spLocks noGrp="1"/>
           </p:cNvSpPr>
@@ -1507,7 +1507,7 @@
       </p:sp>
       <p:sp>
         <p:nvSpPr>
-          <p:cNvPr id="664817056" name="Vertical Text Placeholder 2"/>
+          <p:cNvPr id="850513189" name="Vertical Text Placeholder 2"/>
           <p:cNvSpPr>
             <a:spLocks noGrp="1"/>
           </p:cNvSpPr>
@@ -1573,7 +1573,7 @@
       </p:sp>
       <p:sp>
         <p:nvSpPr>
-          <p:cNvPr id="869879648" name="Date Placeholder 3"/>
+          <p:cNvPr id="1676772261" name="Date Placeholder 3"/>
           <p:cNvSpPr>
             <a:spLocks noGrp="1"/>
           </p:cNvSpPr>
@@ -1599,7 +1599,7 @@
       </p:sp>
       <p:sp>
         <p:nvSpPr>
-          <p:cNvPr id="1666170975" name="Footer Placeholder 4"/>
+          <p:cNvPr id="1291962880" name="Footer Placeholder 4"/>
           <p:cNvSpPr>
             <a:spLocks noGrp="1"/>
           </p:cNvSpPr>
@@ -1621,7 +1621,7 @@
       </p:sp>
       <p:sp>
         <p:nvSpPr>
-          <p:cNvPr id="112643592" name="Slide Number Placeholder 5"/>
+          <p:cNvPr id="1429134277" name="Slide Number Placeholder 5"/>
           <p:cNvSpPr>
             <a:spLocks noGrp="1"/>
           </p:cNvSpPr>
@@ -1672,7 +1672,7 @@
       </p:grpSpPr>
       <p:sp>
         <p:nvSpPr>
-          <p:cNvPr id="1488986118" name="Vertical Title 1"/>
+          <p:cNvPr id="661243172" name="Vertical Title 1"/>
           <p:cNvSpPr>
             <a:spLocks noGrp="1"/>
           </p:cNvSpPr>
@@ -1707,7 +1707,7 @@
       </p:sp>
       <p:sp>
         <p:nvSpPr>
-          <p:cNvPr id="1029571103" name="Vertical Text Placeholder 2"/>
+          <p:cNvPr id="1105646095" name="Vertical Text Placeholder 2"/>
           <p:cNvSpPr>
             <a:spLocks noGrp="1"/>
           </p:cNvSpPr>
@@ -1778,7 +1778,7 @@
       </p:sp>
       <p:sp>
         <p:nvSpPr>
-          <p:cNvPr id="1550350434" name="Date Placeholder 3"/>
+          <p:cNvPr id="914923379" name="Date Placeholder 3"/>
           <p:cNvSpPr>
             <a:spLocks noGrp="1"/>
           </p:cNvSpPr>
@@ -1804,7 +1804,7 @@
       </p:sp>
       <p:sp>
         <p:nvSpPr>
-          <p:cNvPr id="779053406" name="Footer Placeholder 4"/>
+          <p:cNvPr id="322651572" name="Footer Placeholder 4"/>
           <p:cNvSpPr>
             <a:spLocks noGrp="1"/>
           </p:cNvSpPr>
@@ -1826,7 +1826,7 @@
       </p:sp>
       <p:sp>
         <p:nvSpPr>
-          <p:cNvPr id="1944734283" name="Slide Number Placeholder 5"/>
+          <p:cNvPr id="1929357428" name="Slide Number Placeholder 5"/>
           <p:cNvSpPr>
             <a:spLocks noGrp="1"/>
           </p:cNvSpPr>
@@ -1877,7 +1877,7 @@
       </p:grpSpPr>
       <p:sp>
         <p:nvSpPr>
-          <p:cNvPr id="956702495" name="Title 1"/>
+          <p:cNvPr id="1251125815" name="Title 1"/>
           <p:cNvSpPr>
             <a:spLocks noGrp="1"/>
           </p:cNvSpPr>
@@ -1903,7 +1903,7 @@
       </p:sp>
       <p:sp>
         <p:nvSpPr>
-          <p:cNvPr id="287444117" name="Content Placeholder 2"/>
+          <p:cNvPr id="1326017436" name="Content Placeholder 2"/>
           <p:cNvSpPr>
             <a:spLocks noGrp="1"/>
           </p:cNvSpPr>
@@ -1969,7 +1969,7 @@
       </p:sp>
       <p:sp>
         <p:nvSpPr>
-          <p:cNvPr id="594564167" name="Date Placeholder 3"/>
+          <p:cNvPr id="939886975" name="Date Placeholder 3"/>
           <p:cNvSpPr>
             <a:spLocks noGrp="1"/>
           </p:cNvSpPr>
@@ -1995,7 +1995,7 @@
       </p:sp>
       <p:sp>
         <p:nvSpPr>
-          <p:cNvPr id="668061345" name="Footer Placeholder 4"/>
+          <p:cNvPr id="826129390" name="Footer Placeholder 4"/>
           <p:cNvSpPr>
             <a:spLocks noGrp="1"/>
           </p:cNvSpPr>
@@ -2017,7 +2017,7 @@
       </p:sp>
       <p:sp>
         <p:nvSpPr>
-          <p:cNvPr id="1660788383" name="Slide Number Placeholder 5"/>
+          <p:cNvPr id="458594941" name="Slide Number Placeholder 5"/>
           <p:cNvSpPr>
             <a:spLocks noGrp="1"/>
           </p:cNvSpPr>
@@ -2068,7 +2068,7 @@
       </p:grpSpPr>
       <p:sp>
         <p:nvSpPr>
-          <p:cNvPr id="445269803" name="Title 1"/>
+          <p:cNvPr id="1569525293" name="Title 1"/>
           <p:cNvSpPr>
             <a:spLocks noGrp="1"/>
           </p:cNvSpPr>
@@ -2103,7 +2103,7 @@
       </p:sp>
       <p:sp>
         <p:nvSpPr>
-          <p:cNvPr id="1852687400" name="Text Placeholder 2"/>
+          <p:cNvPr id="1560990186" name="Text Placeholder 2"/>
           <p:cNvSpPr>
             <a:spLocks noGrp="1"/>
           </p:cNvSpPr>
@@ -2225,7 +2225,7 @@
       </p:sp>
       <p:sp>
         <p:nvSpPr>
-          <p:cNvPr id="957663322" name="Date Placeholder 3"/>
+          <p:cNvPr id="909619848" name="Date Placeholder 3"/>
           <p:cNvSpPr>
             <a:spLocks noGrp="1"/>
           </p:cNvSpPr>
@@ -2251,7 +2251,7 @@
       </p:sp>
       <p:sp>
         <p:nvSpPr>
-          <p:cNvPr id="1681723825" name="Footer Placeholder 4"/>
+          <p:cNvPr id="70642132" name="Footer Placeholder 4"/>
           <p:cNvSpPr>
             <a:spLocks noGrp="1"/>
           </p:cNvSpPr>
@@ -2273,7 +2273,7 @@
       </p:sp>
       <p:sp>
         <p:nvSpPr>
-          <p:cNvPr id="1163490825" name="Slide Number Placeholder 5"/>
+          <p:cNvPr id="647267840" name="Slide Number Placeholder 5"/>
           <p:cNvSpPr>
             <a:spLocks noGrp="1"/>
           </p:cNvSpPr>
@@ -2324,7 +2324,7 @@
       </p:grpSpPr>
       <p:sp>
         <p:nvSpPr>
-          <p:cNvPr id="1593232272" name="Title 1"/>
+          <p:cNvPr id="843464354" name="Title 1"/>
           <p:cNvSpPr>
             <a:spLocks noGrp="1"/>
           </p:cNvSpPr>
@@ -2350,7 +2350,7 @@
       </p:sp>
       <p:sp>
         <p:nvSpPr>
-          <p:cNvPr id="769010455" name="Content Placeholder 2"/>
+          <p:cNvPr id="1617017964" name="Content Placeholder 2"/>
           <p:cNvSpPr>
             <a:spLocks noGrp="1"/>
           </p:cNvSpPr>
@@ -2449,7 +2449,7 @@
       </p:sp>
       <p:sp>
         <p:nvSpPr>
-          <p:cNvPr id="2127908303" name="Content Placeholder 3"/>
+          <p:cNvPr id="1760926794" name="Content Placeholder 3"/>
           <p:cNvSpPr>
             <a:spLocks noGrp="1"/>
           </p:cNvSpPr>
@@ -2548,7 +2548,7 @@
       </p:sp>
       <p:sp>
         <p:nvSpPr>
-          <p:cNvPr id="909176481" name="Date Placeholder 4"/>
+          <p:cNvPr id="705061990" name="Date Placeholder 4"/>
           <p:cNvSpPr>
             <a:spLocks noGrp="1"/>
           </p:cNvSpPr>
@@ -2574,7 +2574,7 @@
       </p:sp>
       <p:sp>
         <p:nvSpPr>
-          <p:cNvPr id="1073850870" name="Footer Placeholder 5"/>
+          <p:cNvPr id="1519166345" name="Footer Placeholder 5"/>
           <p:cNvSpPr>
             <a:spLocks noGrp="1"/>
           </p:cNvSpPr>
@@ -2596,7 +2596,7 @@
       </p:sp>
       <p:sp>
         <p:nvSpPr>
-          <p:cNvPr id="161148951" name="Slide Number Placeholder 6"/>
+          <p:cNvPr id="65454955" name="Slide Number Placeholder 6"/>
           <p:cNvSpPr>
             <a:spLocks noGrp="1"/>
           </p:cNvSpPr>
@@ -2647,7 +2647,7 @@
       </p:grpSpPr>
       <p:sp>
         <p:nvSpPr>
-          <p:cNvPr id="1420465382" name="Title 1"/>
+          <p:cNvPr id="1432956116" name="Title 1"/>
           <p:cNvSpPr>
             <a:spLocks noGrp="1"/>
           </p:cNvSpPr>
@@ -2677,7 +2677,7 @@
       </p:sp>
       <p:sp>
         <p:nvSpPr>
-          <p:cNvPr id="807188109" name="Text Placeholder 2"/>
+          <p:cNvPr id="1913572652" name="Text Placeholder 2"/>
           <p:cNvSpPr>
             <a:spLocks noGrp="1"/>
           </p:cNvSpPr>
@@ -2745,7 +2745,7 @@
       </p:sp>
       <p:sp>
         <p:nvSpPr>
-          <p:cNvPr id="1807799226" name="Content Placeholder 3"/>
+          <p:cNvPr id="859856011" name="Content Placeholder 3"/>
           <p:cNvSpPr>
             <a:spLocks noGrp="1"/>
           </p:cNvSpPr>
@@ -2844,7 +2844,7 @@
       </p:sp>
       <p:sp>
         <p:nvSpPr>
-          <p:cNvPr id="345449906" name="Text Placeholder 4"/>
+          <p:cNvPr id="659224879" name="Text Placeholder 4"/>
           <p:cNvSpPr>
             <a:spLocks noGrp="1"/>
           </p:cNvSpPr>
@@ -2912,7 +2912,7 @@
       </p:sp>
       <p:sp>
         <p:nvSpPr>
-          <p:cNvPr id="321390031" name="Content Placeholder 5"/>
+          <p:cNvPr id="1962452752" name="Content Placeholder 5"/>
           <p:cNvSpPr>
             <a:spLocks noGrp="1"/>
           </p:cNvSpPr>
@@ -3011,7 +3011,7 @@
       </p:sp>
       <p:sp>
         <p:nvSpPr>
-          <p:cNvPr id="114025062" name="Date Placeholder 6"/>
+          <p:cNvPr id="188970740" name="Date Placeholder 6"/>
           <p:cNvSpPr>
             <a:spLocks noGrp="1"/>
           </p:cNvSpPr>
@@ -3037,7 +3037,7 @@
       </p:sp>
       <p:sp>
         <p:nvSpPr>
-          <p:cNvPr id="838856462" name="Footer Placeholder 7"/>
+          <p:cNvPr id="1499326469" name="Footer Placeholder 7"/>
           <p:cNvSpPr>
             <a:spLocks noGrp="1"/>
           </p:cNvSpPr>
@@ -3059,7 +3059,7 @@
       </p:sp>
       <p:sp>
         <p:nvSpPr>
-          <p:cNvPr id="469853615" name="Slide Number Placeholder 8"/>
+          <p:cNvPr id="1188374117" name="Slide Number Placeholder 8"/>
           <p:cNvSpPr>
             <a:spLocks noGrp="1"/>
           </p:cNvSpPr>
@@ -3110,7 +3110,7 @@
       </p:grpSpPr>
       <p:sp>
         <p:nvSpPr>
-          <p:cNvPr id="1075275354" name="Title 1"/>
+          <p:cNvPr id="1989522425" name="Title 1"/>
           <p:cNvSpPr>
             <a:spLocks noGrp="1"/>
           </p:cNvSpPr>
@@ -3136,7 +3136,7 @@
       </p:sp>
       <p:sp>
         <p:nvSpPr>
-          <p:cNvPr id="369712569" name="Date Placeholder 2"/>
+          <p:cNvPr id="1171035134" name="Date Placeholder 2"/>
           <p:cNvSpPr>
             <a:spLocks noGrp="1"/>
           </p:cNvSpPr>
@@ -3162,7 +3162,7 @@
       </p:sp>
       <p:sp>
         <p:nvSpPr>
-          <p:cNvPr id="2137444411" name="Footer Placeholder 3"/>
+          <p:cNvPr id="1718588013" name="Footer Placeholder 3"/>
           <p:cNvSpPr>
             <a:spLocks noGrp="1"/>
           </p:cNvSpPr>
@@ -3184,7 +3184,7 @@
       </p:sp>
       <p:sp>
         <p:nvSpPr>
-          <p:cNvPr id="1369724668" name="Slide Number Placeholder 4"/>
+          <p:cNvPr id="432838520" name="Slide Number Placeholder 4"/>
           <p:cNvSpPr>
             <a:spLocks noGrp="1"/>
           </p:cNvSpPr>
@@ -3235,7 +3235,7 @@
       </p:grpSpPr>
       <p:sp>
         <p:nvSpPr>
-          <p:cNvPr id="2124965888" name="Date Placeholder 1"/>
+          <p:cNvPr id="1865242530" name="Date Placeholder 1"/>
           <p:cNvSpPr>
             <a:spLocks noGrp="1"/>
           </p:cNvSpPr>
@@ -3261,7 +3261,7 @@
       </p:sp>
       <p:sp>
         <p:nvSpPr>
-          <p:cNvPr id="1475156810" name="Footer Placeholder 2"/>
+          <p:cNvPr id="350588476" name="Footer Placeholder 2"/>
           <p:cNvSpPr>
             <a:spLocks noGrp="1"/>
           </p:cNvSpPr>
@@ -3283,7 +3283,7 @@
       </p:sp>
       <p:sp>
         <p:nvSpPr>
-          <p:cNvPr id="1378721276" name="Slide Number Placeholder 3"/>
+          <p:cNvPr id="262616478" name="Slide Number Placeholder 3"/>
           <p:cNvSpPr>
             <a:spLocks noGrp="1"/>
           </p:cNvSpPr>
@@ -3334,7 +3334,7 @@
       </p:grpSpPr>
       <p:sp>
         <p:nvSpPr>
-          <p:cNvPr id="876634385" name="Title 1"/>
+          <p:cNvPr id="1525761257" name="Title 1"/>
           <p:cNvSpPr>
             <a:spLocks noGrp="1"/>
           </p:cNvSpPr>
@@ -3369,7 +3369,7 @@
       </p:sp>
       <p:sp>
         <p:nvSpPr>
-          <p:cNvPr id="207660599" name="Content Placeholder 2"/>
+          <p:cNvPr id="1553201905" name="Content Placeholder 2"/>
           <p:cNvSpPr>
             <a:spLocks noGrp="1"/>
           </p:cNvSpPr>
@@ -3468,7 +3468,7 @@
       </p:sp>
       <p:sp>
         <p:nvSpPr>
-          <p:cNvPr id="1834794772" name="Text Placeholder 3"/>
+          <p:cNvPr id="1145923191" name="Text Placeholder 3"/>
           <p:cNvSpPr>
             <a:spLocks noGrp="1"/>
           </p:cNvSpPr>
@@ -3536,7 +3536,7 @@
       </p:sp>
       <p:sp>
         <p:nvSpPr>
-          <p:cNvPr id="423192708" name="Date Placeholder 4"/>
+          <p:cNvPr id="698123800" name="Date Placeholder 4"/>
           <p:cNvSpPr>
             <a:spLocks noGrp="1"/>
           </p:cNvSpPr>
@@ -3562,7 +3562,7 @@
       </p:sp>
       <p:sp>
         <p:nvSpPr>
-          <p:cNvPr id="1469070536" name="Footer Placeholder 5"/>
+          <p:cNvPr id="890089800" name="Footer Placeholder 5"/>
           <p:cNvSpPr>
             <a:spLocks noGrp="1"/>
           </p:cNvSpPr>
@@ -3584,7 +3584,7 @@
       </p:sp>
       <p:sp>
         <p:nvSpPr>
-          <p:cNvPr id="1502531882" name="Slide Number Placeholder 6"/>
+          <p:cNvPr id="1122176005" name="Slide Number Placeholder 6"/>
           <p:cNvSpPr>
             <a:spLocks noGrp="1"/>
           </p:cNvSpPr>
@@ -3635,7 +3635,7 @@
       </p:grpSpPr>
       <p:sp>
         <p:nvSpPr>
-          <p:cNvPr id="1787809846" name="Title 1"/>
+          <p:cNvPr id="102594187" name="Title 1"/>
           <p:cNvSpPr>
             <a:spLocks noGrp="1"/>
           </p:cNvSpPr>
@@ -3670,7 +3670,7 @@
       </p:sp>
       <p:sp>
         <p:nvSpPr>
-          <p:cNvPr id="85832214" name="Picture Placeholder 2"/>
+          <p:cNvPr id="281060672" name="Picture Placeholder 2"/>
           <p:cNvSpPr>
             <a:spLocks noGrp="1"/>
           </p:cNvSpPr>
@@ -3734,7 +3734,7 @@
       </p:sp>
       <p:sp>
         <p:nvSpPr>
-          <p:cNvPr id="1563534328" name="Text Placeholder 3"/>
+          <p:cNvPr id="1619124528" name="Text Placeholder 3"/>
           <p:cNvSpPr>
             <a:spLocks noGrp="1"/>
           </p:cNvSpPr>
@@ -3802,7 +3802,7 @@
       </p:sp>
       <p:sp>
         <p:nvSpPr>
-          <p:cNvPr id="970303420" name="Date Placeholder 4"/>
+          <p:cNvPr id="697835563" name="Date Placeholder 4"/>
           <p:cNvSpPr>
             <a:spLocks noGrp="1"/>
           </p:cNvSpPr>
@@ -3828,7 +3828,7 @@
       </p:sp>
       <p:sp>
         <p:nvSpPr>
-          <p:cNvPr id="1483136993" name="Footer Placeholder 5"/>
+          <p:cNvPr id="233218339" name="Footer Placeholder 5"/>
           <p:cNvSpPr>
             <a:spLocks noGrp="1"/>
           </p:cNvSpPr>
@@ -3850,7 +3850,7 @@
       </p:sp>
       <p:sp>
         <p:nvSpPr>
-          <p:cNvPr id="781847879" name="Slide Number Placeholder 6"/>
+          <p:cNvPr id="141886962" name="Slide Number Placeholder 6"/>
           <p:cNvSpPr>
             <a:spLocks noGrp="1"/>
           </p:cNvSpPr>
@@ -3906,7 +3906,7 @@
       </p:grpSpPr>
       <p:sp>
         <p:nvSpPr>
-          <p:cNvPr id="1498921788" name="Shape 1059"/>
+          <p:cNvPr id="1625983356" name="Shape 1059"/>
           <p:cNvSpPr>
             <a:spLocks noChangeArrowheads="1" noGrp="1"/>
           </p:cNvSpPr>
@@ -3984,7 +3984,7 @@
       </p:sp>
       <p:sp>
         <p:nvSpPr>
-          <p:cNvPr id="1961579264" name="Shape 1060"/>
+          <p:cNvPr id="945980524" name="Shape 1060"/>
           <p:cNvSpPr>
             <a:spLocks noChangeArrowheads="1" noGrp="1"/>
           </p:cNvSpPr>
@@ -4065,7 +4065,7 @@
       </p:sp>
       <p:sp>
         <p:nvSpPr>
-          <p:cNvPr id="82652751" name="Shape 1061"/>
+          <p:cNvPr id="353444028" name="Shape 1061"/>
           <p:cNvSpPr>
             <a:spLocks noChangeArrowheads="1" noGrp="1"/>
           </p:cNvSpPr>
@@ -4183,7 +4183,7 @@
       </p:sp>
       <p:sp>
         <p:nvSpPr>
-          <p:cNvPr id="38291320" name="Title 1"/>
+          <p:cNvPr id="1850777193" name="Title 1"/>
           <p:cNvSpPr>
             <a:spLocks noGrp="1"/>
           </p:cNvSpPr>
@@ -4219,7 +4219,7 @@
       </p:sp>
       <p:sp>
         <p:nvSpPr>
-          <p:cNvPr id="1060451992" name="Text Placeholder 2"/>
+          <p:cNvPr id="388359793" name="Text Placeholder 2"/>
           <p:cNvSpPr>
             <a:spLocks noGrp="1"/>
           </p:cNvSpPr>
@@ -4295,7 +4295,7 @@
       </p:sp>
       <p:sp>
         <p:nvSpPr>
-          <p:cNvPr id="525016437" name="Date Placeholder 3"/>
+          <p:cNvPr id="1608081792" name="Date Placeholder 3"/>
           <p:cNvSpPr>
             <a:spLocks noGrp="1"/>
           </p:cNvSpPr>
@@ -4339,7 +4339,7 @@
       </p:sp>
       <p:sp>
         <p:nvSpPr>
-          <p:cNvPr id="1899855725" name="Footer Placeholder 4"/>
+          <p:cNvPr id="13197149" name="Footer Placeholder 4"/>
           <p:cNvSpPr>
             <a:spLocks noGrp="1"/>
           </p:cNvSpPr>
@@ -4379,7 +4379,7 @@
       </p:sp>
       <p:sp>
         <p:nvSpPr>
-          <p:cNvPr id="165953450" name="Slide Number Placeholder 5"/>
+          <p:cNvPr id="559667112" name="Slide Number Placeholder 5"/>
           <p:cNvSpPr>
             <a:spLocks noGrp="1"/>
           </p:cNvSpPr>
@@ -4727,7 +4727,7 @@
       </p:grpSpPr>
       <p:sp>
         <p:nvSpPr>
-          <p:cNvPr id="1125971048" name="Title 1"/>
+          <p:cNvPr id="1310453495" name="Title 1"/>
           <p:cNvSpPr>
             <a:spLocks noGrp="1"/>
           </p:cNvSpPr>
@@ -4760,7 +4760,7 @@
       </p:sp>
       <p:sp>
         <p:nvSpPr>
-          <p:cNvPr id="395808881" name=""/>
+          <p:cNvPr id="1360524084" name=""/>
           <p:cNvSpPr txBox="1"/>
           <p:nvPr/>
         </p:nvSpPr>
@@ -5046,7 +5046,9 @@
         </p:nvSpPr>
         <p:spPr bwMode="auto"/>
         <p:txBody>
-          <a:bodyPr/>
+          <a:bodyPr vertOverflow="overflow" horzOverflow="overflow" vert="horz" wrap="square" lIns="91440" tIns="45720" rIns="91440" bIns="45720" numCol="1" spcCol="0" rtlCol="0" fromWordArt="0" anchor="t" anchorCtr="0" forceAA="0" upright="0" compatLnSpc="0">
+            <a:normAutofit/>
+          </a:bodyPr>
           <a:lstStyle/>
           <a:p>
             <a:pPr marL="0" indent="0">
@@ -5105,6 +5107,44 @@
             <a:r>
               <a:rPr sz="2800" i="0"/>
               <a:t>) di bidang/konteks lain</a:t>
+            </a:r>
+            <a:endParaRPr sz="2800" i="0"/>
+          </a:p>
+          <a:p>
+            <a:pPr>
+              <a:defRPr/>
+            </a:pPr>
+            <a:endParaRPr sz="2800" i="0"/>
+          </a:p>
+          <a:p>
+            <a:pPr marL="0" indent="0">
+              <a:buFont typeface="Arial"/>
+              <a:buNone/>
+              <a:defRPr/>
+            </a:pPr>
+            <a:r>
+              <a:rPr sz="2800" i="0"/>
+              <a:t>Jadwal UAS:</a:t>
+            </a:r>
+            <a:endParaRPr sz="2800" i="0"/>
+          </a:p>
+          <a:p>
+            <a:pPr>
+              <a:defRPr/>
+            </a:pPr>
+            <a:r>
+              <a:rPr sz="2800" i="0"/>
+              <a:t>Kelas C: 18 dan 19 Juni</a:t>
+            </a:r>
+            <a:endParaRPr sz="2800" i="0"/>
+          </a:p>
+          <a:p>
+            <a:pPr>
+              <a:defRPr/>
+            </a:pPr>
+            <a:r>
+              <a:rPr sz="2800" i="0"/>
+              <a:t>Kelas D: 12 dan 19 Juni</a:t>
             </a:r>
             <a:endParaRPr sz="2800" i="0"/>
           </a:p>

--- a/rubrikEAS.pptx
+++ b/rubrikEAS.pptx
@@ -5,12 +5,13 @@
     <p:sldMasterId id="2147483648" r:id="rId1"/>
   </p:sldMasterIdLst>
   <p:notesMasterIdLst>
-    <p:notesMasterId r:id="rId7"/>
+    <p:notesMasterId r:id="rId8"/>
   </p:notesMasterIdLst>
   <p:sldIdLst>
     <p:sldId id="256" r:id="rId4"/>
     <p:sldId id="257" r:id="rId5"/>
     <p:sldId id="258" r:id="rId6"/>
+    <p:sldId id="259" r:id="rId7"/>
   </p:sldIdLst>
   <p:sldSz cx="12192000" cy="6858000"/>
   <p:notesSz cx="6858000" cy="9144000"/>
@@ -136,7 +137,7 @@
       </p:grpSpPr>
       <p:sp>
         <p:nvSpPr>
-          <p:cNvPr id="2118166498" name="Header Placeholder 1"/>
+          <p:cNvPr id="1908828075" name="Header Placeholder 1"/>
           <p:cNvSpPr>
             <a:spLocks noGrp="1"/>
           </p:cNvSpPr>
@@ -170,7 +171,7 @@
       </p:sp>
       <p:sp>
         <p:nvSpPr>
-          <p:cNvPr id="1965451936" name="Date Placeholder 2"/>
+          <p:cNvPr id="856498263" name="Date Placeholder 2"/>
           <p:cNvSpPr>
             <a:spLocks noGrp="1"/>
           </p:cNvSpPr>
@@ -208,7 +209,7 @@
       </p:sp>
       <p:sp>
         <p:nvSpPr>
-          <p:cNvPr id="926389279" name="Slide Image Placeholder 3"/>
+          <p:cNvPr id="163899093" name="Slide Image Placeholder 3"/>
           <p:cNvSpPr>
             <a:spLocks noChangeAspect="1" noGrp="1" noRot="1"/>
           </p:cNvSpPr>
@@ -244,7 +245,7 @@
       </p:sp>
       <p:sp>
         <p:nvSpPr>
-          <p:cNvPr id="1451787987" name="Notes Placeholder 4"/>
+          <p:cNvPr id="1921484984" name="Notes Placeholder 4"/>
           <p:cNvSpPr>
             <a:spLocks noGrp="1"/>
           </p:cNvSpPr>
@@ -318,7 +319,7 @@
       </p:sp>
       <p:sp>
         <p:nvSpPr>
-          <p:cNvPr id="315486897" name="Footer Placeholder 5"/>
+          <p:cNvPr id="1604258768" name="Footer Placeholder 5"/>
           <p:cNvSpPr>
             <a:spLocks noGrp="1"/>
           </p:cNvSpPr>
@@ -352,7 +353,7 @@
       </p:sp>
       <p:sp>
         <p:nvSpPr>
-          <p:cNvPr id="945682516" name="Slide Number Placeholder 6"/>
+          <p:cNvPr id="912554745" name="Slide Number Placeholder 6"/>
           <p:cNvSpPr>
             <a:spLocks noGrp="1"/>
           </p:cNvSpPr>
@@ -505,7 +506,7 @@
       </p:grpSpPr>
       <p:sp>
         <p:nvSpPr>
-          <p:cNvPr id="1314718399" name="Slide Image Placeholder 1"/>
+          <p:cNvPr id="2124663203" name="Slide Image Placeholder 1"/>
           <p:cNvSpPr>
             <a:spLocks noChangeAspect="1" noGrp="1" noRot="1"/>
           </p:cNvSpPr>
@@ -522,7 +523,7 @@
       </p:sp>
       <p:sp>
         <p:nvSpPr>
-          <p:cNvPr id="1813321671" name="Notes Placeholder 2"/>
+          <p:cNvPr id="996991268" name="Notes Placeholder 2"/>
           <p:cNvSpPr>
             <a:spLocks noGrp="1"/>
           </p:cNvSpPr>
@@ -547,7 +548,7 @@
       </p:sp>
       <p:sp>
         <p:nvSpPr>
-          <p:cNvPr id="1226931591" name="Slide Number Placeholder 3"/>
+          <p:cNvPr id="21131050" name="Slide Number Placeholder 3"/>
           <p:cNvSpPr>
             <a:spLocks noGrp="1"/>
           </p:cNvSpPr>
@@ -749,6 +750,91 @@
 </p:notes>
 </file>
 
+<file path=ppt/notesSlides/notesSlide4.xml><?xml version="1.0" encoding="utf-8"?>
+<p:notes xmlns:a="http://schemas.openxmlformats.org/drawingml/2006/main" xmlns:r="http://schemas.openxmlformats.org/officeDocument/2006/relationships" xmlns:p="http://schemas.openxmlformats.org/presentationml/2006/main" xmlns:m="http://schemas.openxmlformats.org/officeDocument/2006/math" xmlns:w="http://schemas.openxmlformats.org/wordprocessingml/2006/main">
+  <p:cSld name="">
+    <p:spTree>
+      <p:nvGrpSpPr>
+        <p:cNvPr id="1" name=""/>
+        <p:cNvGrpSpPr/>
+        <p:nvPr/>
+      </p:nvGrpSpPr>
+      <p:grpSpPr bwMode="auto">
+        <a:xfrm>
+          <a:off x="0" y="0"/>
+          <a:ext cx="0" cy="0"/>
+          <a:chOff x="0" y="0"/>
+          <a:chExt cx="0" cy="0"/>
+        </a:xfrm>
+      </p:grpSpPr>
+      <p:sp>
+        <p:nvSpPr>
+          <p:cNvPr id="1418763372" name="Slide Image Placeholder 1"/>
+          <p:cNvSpPr>
+            <a:spLocks noChangeAspect="1" noGrp="1" noRot="1"/>
+          </p:cNvSpPr>
+          <p:nvPr>
+            <p:ph type="sldImg"/>
+          </p:nvPr>
+        </p:nvSpPr>
+        <p:spPr bwMode="auto"/>
+      </p:sp>
+      <p:sp>
+        <p:nvSpPr>
+          <p:cNvPr id="1360058458" name="Notes Placeholder 2"/>
+          <p:cNvSpPr>
+            <a:spLocks noGrp="1"/>
+          </p:cNvSpPr>
+          <p:nvPr>
+            <p:ph type="body" idx="1"/>
+          </p:nvPr>
+        </p:nvSpPr>
+        <p:spPr bwMode="auto"/>
+        <p:txBody>
+          <a:bodyPr/>
+          <a:lstStyle/>
+          <a:p>
+            <a:pPr>
+              <a:defRPr/>
+            </a:pPr>
+            <a:endParaRPr/>
+          </a:p>
+        </p:txBody>
+      </p:sp>
+      <p:sp>
+        <p:nvSpPr>
+          <p:cNvPr id="588556986" name="Slide Number Placeholder 3"/>
+          <p:cNvSpPr>
+            <a:spLocks noGrp="1"/>
+          </p:cNvSpPr>
+          <p:nvPr>
+            <p:ph type="sldNum" sz="quarter" idx="10"/>
+          </p:nvPr>
+        </p:nvSpPr>
+        <p:spPr bwMode="auto"/>
+        <p:txBody>
+          <a:bodyPr/>
+          <a:lstStyle/>
+          <a:p>
+            <a:pPr>
+              <a:defRPr/>
+            </a:pPr>
+            <a:fld id="{72E640BF-F134-A0D3-A7D3-585BB86E125B}" type="slidenum">
+              <a:rPr/>
+              <a:t/>
+            </a:fld>
+            <a:endParaRPr/>
+          </a:p>
+        </p:txBody>
+      </p:sp>
+    </p:spTree>
+  </p:cSld>
+  <p:clrMapOvr>
+    <a:masterClrMapping/>
+  </p:clrMapOvr>
+</p:notes>
+</file>
+
 <file path=ppt/slideLayouts/slideLayout1.xml><?xml version="1.0" encoding="utf-8"?>
 <p:sldLayout xmlns:a="http://schemas.openxmlformats.org/drawingml/2006/main" xmlns:r="http://schemas.openxmlformats.org/officeDocument/2006/relationships" xmlns:p="http://schemas.openxmlformats.org/presentationml/2006/main" xmlns:m="http://schemas.openxmlformats.org/officeDocument/2006/math" xmlns:w="http://schemas.openxmlformats.org/wordprocessingml/2006/main" matchingName="" preserve="1" showMasterPhAnim="0" showMasterSp="0" type="title" userDrawn="1">
   <p:cSld name="Title Slide">
@@ -768,7 +854,7 @@
       </p:grpSpPr>
       <p:sp>
         <p:nvSpPr>
-          <p:cNvPr id="1307909018" name="Shape 1059"/>
+          <p:cNvPr id="1367231634" name="Shape 1059"/>
           <p:cNvSpPr>
             <a:spLocks noChangeArrowheads="1" noGrp="1"/>
           </p:cNvSpPr>
@@ -891,7 +977,7 @@
       </p:sp>
       <p:sp>
         <p:nvSpPr>
-          <p:cNvPr id="1981563902" name="Shape 1060"/>
+          <p:cNvPr id="272752381" name="Shape 1060"/>
           <p:cNvSpPr>
             <a:spLocks noChangeArrowheads="1" noGrp="1"/>
           </p:cNvSpPr>
@@ -982,7 +1068,7 @@
       </p:sp>
       <p:sp>
         <p:nvSpPr>
-          <p:cNvPr id="953698056" name="Shape 1061"/>
+          <p:cNvPr id="466541774" name="Shape 1061"/>
           <p:cNvSpPr>
             <a:spLocks noChangeArrowheads="1" noGrp="1"/>
           </p:cNvSpPr>
@@ -1068,7 +1154,7 @@
       </p:sp>
       <p:sp>
         <p:nvSpPr>
-          <p:cNvPr id="1457424857" name="Shape 1062"/>
+          <p:cNvPr id="1204906367" name="Shape 1062"/>
           <p:cNvSpPr>
             <a:spLocks noChangeArrowheads="1" noGrp="1"/>
           </p:cNvSpPr>
@@ -1146,7 +1232,7 @@
       </p:sp>
       <p:sp>
         <p:nvSpPr>
-          <p:cNvPr id="2106110876" name="Shape 1063"/>
+          <p:cNvPr id="31609557" name="Shape 1063"/>
           <p:cNvSpPr>
             <a:spLocks noChangeArrowheads="1" noGrp="1"/>
           </p:cNvSpPr>
@@ -1224,7 +1310,7 @@
       </p:sp>
       <p:sp>
         <p:nvSpPr>
-          <p:cNvPr id="818674093" name="Subtitle 2"/>
+          <p:cNvPr id="1935757465" name="Subtitle 2"/>
           <p:cNvSpPr>
             <a:spLocks noGrp="1"/>
           </p:cNvSpPr>
@@ -1347,7 +1433,7 @@
       </p:sp>
       <p:sp>
         <p:nvSpPr>
-          <p:cNvPr id="5636395" name="Date Placeholder 3"/>
+          <p:cNvPr id="643677007" name="Date Placeholder 3"/>
           <p:cNvSpPr>
             <a:spLocks noGrp="1"/>
           </p:cNvSpPr>
@@ -1373,7 +1459,7 @@
       </p:sp>
       <p:sp>
         <p:nvSpPr>
-          <p:cNvPr id="1850344507" name="Footer Placeholder 4"/>
+          <p:cNvPr id="1561697361" name="Footer Placeholder 4"/>
           <p:cNvSpPr>
             <a:spLocks noGrp="1"/>
           </p:cNvSpPr>
@@ -1395,7 +1481,7 @@
       </p:sp>
       <p:sp>
         <p:nvSpPr>
-          <p:cNvPr id="603916600" name="Slide Number Placeholder 5"/>
+          <p:cNvPr id="1512260621" name="Slide Number Placeholder 5"/>
           <p:cNvSpPr>
             <a:spLocks noGrp="1"/>
           </p:cNvSpPr>
@@ -1421,7 +1507,7 @@
       </p:sp>
       <p:sp>
         <p:nvSpPr>
-          <p:cNvPr id="882359836" name="Title 6"/>
+          <p:cNvPr id="1609655058" name="Title 6"/>
           <p:cNvSpPr>
             <a:spLocks noGrp="1"/>
           </p:cNvSpPr>
@@ -1481,7 +1567,7 @@
       </p:grpSpPr>
       <p:sp>
         <p:nvSpPr>
-          <p:cNvPr id="975482753" name="Title 1"/>
+          <p:cNvPr id="851002567" name="Title 1"/>
           <p:cNvSpPr>
             <a:spLocks noGrp="1"/>
           </p:cNvSpPr>
@@ -1507,7 +1593,7 @@
       </p:sp>
       <p:sp>
         <p:nvSpPr>
-          <p:cNvPr id="850513189" name="Vertical Text Placeholder 2"/>
+          <p:cNvPr id="1818810346" name="Vertical Text Placeholder 2"/>
           <p:cNvSpPr>
             <a:spLocks noGrp="1"/>
           </p:cNvSpPr>
@@ -1573,7 +1659,7 @@
       </p:sp>
       <p:sp>
         <p:nvSpPr>
-          <p:cNvPr id="1676772261" name="Date Placeholder 3"/>
+          <p:cNvPr id="1462538837" name="Date Placeholder 3"/>
           <p:cNvSpPr>
             <a:spLocks noGrp="1"/>
           </p:cNvSpPr>
@@ -1599,7 +1685,7 @@
       </p:sp>
       <p:sp>
         <p:nvSpPr>
-          <p:cNvPr id="1291962880" name="Footer Placeholder 4"/>
+          <p:cNvPr id="123434279" name="Footer Placeholder 4"/>
           <p:cNvSpPr>
             <a:spLocks noGrp="1"/>
           </p:cNvSpPr>
@@ -1621,7 +1707,7 @@
       </p:sp>
       <p:sp>
         <p:nvSpPr>
-          <p:cNvPr id="1429134277" name="Slide Number Placeholder 5"/>
+          <p:cNvPr id="1354579274" name="Slide Number Placeholder 5"/>
           <p:cNvSpPr>
             <a:spLocks noGrp="1"/>
           </p:cNvSpPr>
@@ -1672,7 +1758,7 @@
       </p:grpSpPr>
       <p:sp>
         <p:nvSpPr>
-          <p:cNvPr id="661243172" name="Vertical Title 1"/>
+          <p:cNvPr id="211643653" name="Vertical Title 1"/>
           <p:cNvSpPr>
             <a:spLocks noGrp="1"/>
           </p:cNvSpPr>
@@ -1707,7 +1793,7 @@
       </p:sp>
       <p:sp>
         <p:nvSpPr>
-          <p:cNvPr id="1105646095" name="Vertical Text Placeholder 2"/>
+          <p:cNvPr id="1505047691" name="Vertical Text Placeholder 2"/>
           <p:cNvSpPr>
             <a:spLocks noGrp="1"/>
           </p:cNvSpPr>
@@ -1778,7 +1864,7 @@
       </p:sp>
       <p:sp>
         <p:nvSpPr>
-          <p:cNvPr id="914923379" name="Date Placeholder 3"/>
+          <p:cNvPr id="129808902" name="Date Placeholder 3"/>
           <p:cNvSpPr>
             <a:spLocks noGrp="1"/>
           </p:cNvSpPr>
@@ -1804,7 +1890,7 @@
       </p:sp>
       <p:sp>
         <p:nvSpPr>
-          <p:cNvPr id="322651572" name="Footer Placeholder 4"/>
+          <p:cNvPr id="696927262" name="Footer Placeholder 4"/>
           <p:cNvSpPr>
             <a:spLocks noGrp="1"/>
           </p:cNvSpPr>
@@ -1826,7 +1912,7 @@
       </p:sp>
       <p:sp>
         <p:nvSpPr>
-          <p:cNvPr id="1929357428" name="Slide Number Placeholder 5"/>
+          <p:cNvPr id="1039417192" name="Slide Number Placeholder 5"/>
           <p:cNvSpPr>
             <a:spLocks noGrp="1"/>
           </p:cNvSpPr>
@@ -1877,7 +1963,7 @@
       </p:grpSpPr>
       <p:sp>
         <p:nvSpPr>
-          <p:cNvPr id="1251125815" name="Title 1"/>
+          <p:cNvPr id="930927742" name="Title 1"/>
           <p:cNvSpPr>
             <a:spLocks noGrp="1"/>
           </p:cNvSpPr>
@@ -1903,7 +1989,7 @@
       </p:sp>
       <p:sp>
         <p:nvSpPr>
-          <p:cNvPr id="1326017436" name="Content Placeholder 2"/>
+          <p:cNvPr id="1514858153" name="Content Placeholder 2"/>
           <p:cNvSpPr>
             <a:spLocks noGrp="1"/>
           </p:cNvSpPr>
@@ -1969,7 +2055,7 @@
       </p:sp>
       <p:sp>
         <p:nvSpPr>
-          <p:cNvPr id="939886975" name="Date Placeholder 3"/>
+          <p:cNvPr id="1047813315" name="Date Placeholder 3"/>
           <p:cNvSpPr>
             <a:spLocks noGrp="1"/>
           </p:cNvSpPr>
@@ -1995,7 +2081,7 @@
       </p:sp>
       <p:sp>
         <p:nvSpPr>
-          <p:cNvPr id="826129390" name="Footer Placeholder 4"/>
+          <p:cNvPr id="717943188" name="Footer Placeholder 4"/>
           <p:cNvSpPr>
             <a:spLocks noGrp="1"/>
           </p:cNvSpPr>
@@ -2017,7 +2103,7 @@
       </p:sp>
       <p:sp>
         <p:nvSpPr>
-          <p:cNvPr id="458594941" name="Slide Number Placeholder 5"/>
+          <p:cNvPr id="1739454356" name="Slide Number Placeholder 5"/>
           <p:cNvSpPr>
             <a:spLocks noGrp="1"/>
           </p:cNvSpPr>
@@ -2068,7 +2154,7 @@
       </p:grpSpPr>
       <p:sp>
         <p:nvSpPr>
-          <p:cNvPr id="1569525293" name="Title 1"/>
+          <p:cNvPr id="1945075947" name="Title 1"/>
           <p:cNvSpPr>
             <a:spLocks noGrp="1"/>
           </p:cNvSpPr>
@@ -2103,7 +2189,7 @@
       </p:sp>
       <p:sp>
         <p:nvSpPr>
-          <p:cNvPr id="1560990186" name="Text Placeholder 2"/>
+          <p:cNvPr id="1485254172" name="Text Placeholder 2"/>
           <p:cNvSpPr>
             <a:spLocks noGrp="1"/>
           </p:cNvSpPr>
@@ -2225,7 +2311,7 @@
       </p:sp>
       <p:sp>
         <p:nvSpPr>
-          <p:cNvPr id="909619848" name="Date Placeholder 3"/>
+          <p:cNvPr id="1328944724" name="Date Placeholder 3"/>
           <p:cNvSpPr>
             <a:spLocks noGrp="1"/>
           </p:cNvSpPr>
@@ -2251,7 +2337,7 @@
       </p:sp>
       <p:sp>
         <p:nvSpPr>
-          <p:cNvPr id="70642132" name="Footer Placeholder 4"/>
+          <p:cNvPr id="2111127425" name="Footer Placeholder 4"/>
           <p:cNvSpPr>
             <a:spLocks noGrp="1"/>
           </p:cNvSpPr>
@@ -2273,7 +2359,7 @@
       </p:sp>
       <p:sp>
         <p:nvSpPr>
-          <p:cNvPr id="647267840" name="Slide Number Placeholder 5"/>
+          <p:cNvPr id="515226255" name="Slide Number Placeholder 5"/>
           <p:cNvSpPr>
             <a:spLocks noGrp="1"/>
           </p:cNvSpPr>
@@ -2324,7 +2410,7 @@
       </p:grpSpPr>
       <p:sp>
         <p:nvSpPr>
-          <p:cNvPr id="843464354" name="Title 1"/>
+          <p:cNvPr id="2008582800" name="Title 1"/>
           <p:cNvSpPr>
             <a:spLocks noGrp="1"/>
           </p:cNvSpPr>
@@ -2350,7 +2436,7 @@
       </p:sp>
       <p:sp>
         <p:nvSpPr>
-          <p:cNvPr id="1617017964" name="Content Placeholder 2"/>
+          <p:cNvPr id="1081143984" name="Content Placeholder 2"/>
           <p:cNvSpPr>
             <a:spLocks noGrp="1"/>
           </p:cNvSpPr>
@@ -2449,7 +2535,7 @@
       </p:sp>
       <p:sp>
         <p:nvSpPr>
-          <p:cNvPr id="1760926794" name="Content Placeholder 3"/>
+          <p:cNvPr id="2073891956" name="Content Placeholder 3"/>
           <p:cNvSpPr>
             <a:spLocks noGrp="1"/>
           </p:cNvSpPr>
@@ -2548,7 +2634,7 @@
       </p:sp>
       <p:sp>
         <p:nvSpPr>
-          <p:cNvPr id="705061990" name="Date Placeholder 4"/>
+          <p:cNvPr id="2101577369" name="Date Placeholder 4"/>
           <p:cNvSpPr>
             <a:spLocks noGrp="1"/>
           </p:cNvSpPr>
@@ -2574,7 +2660,7 @@
       </p:sp>
       <p:sp>
         <p:nvSpPr>
-          <p:cNvPr id="1519166345" name="Footer Placeholder 5"/>
+          <p:cNvPr id="65186339" name="Footer Placeholder 5"/>
           <p:cNvSpPr>
             <a:spLocks noGrp="1"/>
           </p:cNvSpPr>
@@ -2596,7 +2682,7 @@
       </p:sp>
       <p:sp>
         <p:nvSpPr>
-          <p:cNvPr id="65454955" name="Slide Number Placeholder 6"/>
+          <p:cNvPr id="743477683" name="Slide Number Placeholder 6"/>
           <p:cNvSpPr>
             <a:spLocks noGrp="1"/>
           </p:cNvSpPr>
@@ -2647,7 +2733,7 @@
       </p:grpSpPr>
       <p:sp>
         <p:nvSpPr>
-          <p:cNvPr id="1432956116" name="Title 1"/>
+          <p:cNvPr id="1698626734" name="Title 1"/>
           <p:cNvSpPr>
             <a:spLocks noGrp="1"/>
           </p:cNvSpPr>
@@ -2677,7 +2763,7 @@
       </p:sp>
       <p:sp>
         <p:nvSpPr>
-          <p:cNvPr id="1913572652" name="Text Placeholder 2"/>
+          <p:cNvPr id="19922352" name="Text Placeholder 2"/>
           <p:cNvSpPr>
             <a:spLocks noGrp="1"/>
           </p:cNvSpPr>
@@ -2745,7 +2831,7 @@
       </p:sp>
       <p:sp>
         <p:nvSpPr>
-          <p:cNvPr id="859856011" name="Content Placeholder 3"/>
+          <p:cNvPr id="818277888" name="Content Placeholder 3"/>
           <p:cNvSpPr>
             <a:spLocks noGrp="1"/>
           </p:cNvSpPr>
@@ -2844,7 +2930,7 @@
       </p:sp>
       <p:sp>
         <p:nvSpPr>
-          <p:cNvPr id="659224879" name="Text Placeholder 4"/>
+          <p:cNvPr id="1089565616" name="Text Placeholder 4"/>
           <p:cNvSpPr>
             <a:spLocks noGrp="1"/>
           </p:cNvSpPr>
@@ -2912,7 +2998,7 @@
       </p:sp>
       <p:sp>
         <p:nvSpPr>
-          <p:cNvPr id="1962452752" name="Content Placeholder 5"/>
+          <p:cNvPr id="968068089" name="Content Placeholder 5"/>
           <p:cNvSpPr>
             <a:spLocks noGrp="1"/>
           </p:cNvSpPr>
@@ -3011,7 +3097,7 @@
       </p:sp>
       <p:sp>
         <p:nvSpPr>
-          <p:cNvPr id="188970740" name="Date Placeholder 6"/>
+          <p:cNvPr id="1344643127" name="Date Placeholder 6"/>
           <p:cNvSpPr>
             <a:spLocks noGrp="1"/>
           </p:cNvSpPr>
@@ -3037,7 +3123,7 @@
       </p:sp>
       <p:sp>
         <p:nvSpPr>
-          <p:cNvPr id="1499326469" name="Footer Placeholder 7"/>
+          <p:cNvPr id="674207531" name="Footer Placeholder 7"/>
           <p:cNvSpPr>
             <a:spLocks noGrp="1"/>
           </p:cNvSpPr>
@@ -3059,7 +3145,7 @@
       </p:sp>
       <p:sp>
         <p:nvSpPr>
-          <p:cNvPr id="1188374117" name="Slide Number Placeholder 8"/>
+          <p:cNvPr id="1139016621" name="Slide Number Placeholder 8"/>
           <p:cNvSpPr>
             <a:spLocks noGrp="1"/>
           </p:cNvSpPr>
@@ -3110,7 +3196,7 @@
       </p:grpSpPr>
       <p:sp>
         <p:nvSpPr>
-          <p:cNvPr id="1989522425" name="Title 1"/>
+          <p:cNvPr id="763987756" name="Title 1"/>
           <p:cNvSpPr>
             <a:spLocks noGrp="1"/>
           </p:cNvSpPr>
@@ -3136,7 +3222,7 @@
       </p:sp>
       <p:sp>
         <p:nvSpPr>
-          <p:cNvPr id="1171035134" name="Date Placeholder 2"/>
+          <p:cNvPr id="330059104" name="Date Placeholder 2"/>
           <p:cNvSpPr>
             <a:spLocks noGrp="1"/>
           </p:cNvSpPr>
@@ -3162,7 +3248,7 @@
       </p:sp>
       <p:sp>
         <p:nvSpPr>
-          <p:cNvPr id="1718588013" name="Footer Placeholder 3"/>
+          <p:cNvPr id="851847564" name="Footer Placeholder 3"/>
           <p:cNvSpPr>
             <a:spLocks noGrp="1"/>
           </p:cNvSpPr>
@@ -3184,7 +3270,7 @@
       </p:sp>
       <p:sp>
         <p:nvSpPr>
-          <p:cNvPr id="432838520" name="Slide Number Placeholder 4"/>
+          <p:cNvPr id="1285181261" name="Slide Number Placeholder 4"/>
           <p:cNvSpPr>
             <a:spLocks noGrp="1"/>
           </p:cNvSpPr>
@@ -3235,7 +3321,7 @@
       </p:grpSpPr>
       <p:sp>
         <p:nvSpPr>
-          <p:cNvPr id="1865242530" name="Date Placeholder 1"/>
+          <p:cNvPr id="1723059132" name="Date Placeholder 1"/>
           <p:cNvSpPr>
             <a:spLocks noGrp="1"/>
           </p:cNvSpPr>
@@ -3261,7 +3347,7 @@
       </p:sp>
       <p:sp>
         <p:nvSpPr>
-          <p:cNvPr id="350588476" name="Footer Placeholder 2"/>
+          <p:cNvPr id="646910622" name="Footer Placeholder 2"/>
           <p:cNvSpPr>
             <a:spLocks noGrp="1"/>
           </p:cNvSpPr>
@@ -3283,7 +3369,7 @@
       </p:sp>
       <p:sp>
         <p:nvSpPr>
-          <p:cNvPr id="262616478" name="Slide Number Placeholder 3"/>
+          <p:cNvPr id="245649872" name="Slide Number Placeholder 3"/>
           <p:cNvSpPr>
             <a:spLocks noGrp="1"/>
           </p:cNvSpPr>
@@ -3334,7 +3420,7 @@
       </p:grpSpPr>
       <p:sp>
         <p:nvSpPr>
-          <p:cNvPr id="1525761257" name="Title 1"/>
+          <p:cNvPr id="1232506182" name="Title 1"/>
           <p:cNvSpPr>
             <a:spLocks noGrp="1"/>
           </p:cNvSpPr>
@@ -3369,7 +3455,7 @@
       </p:sp>
       <p:sp>
         <p:nvSpPr>
-          <p:cNvPr id="1553201905" name="Content Placeholder 2"/>
+          <p:cNvPr id="998794422" name="Content Placeholder 2"/>
           <p:cNvSpPr>
             <a:spLocks noGrp="1"/>
           </p:cNvSpPr>
@@ -3468,7 +3554,7 @@
       </p:sp>
       <p:sp>
         <p:nvSpPr>
-          <p:cNvPr id="1145923191" name="Text Placeholder 3"/>
+          <p:cNvPr id="302889392" name="Text Placeholder 3"/>
           <p:cNvSpPr>
             <a:spLocks noGrp="1"/>
           </p:cNvSpPr>
@@ -3536,7 +3622,7 @@
       </p:sp>
       <p:sp>
         <p:nvSpPr>
-          <p:cNvPr id="698123800" name="Date Placeholder 4"/>
+          <p:cNvPr id="230946611" name="Date Placeholder 4"/>
           <p:cNvSpPr>
             <a:spLocks noGrp="1"/>
           </p:cNvSpPr>
@@ -3562,7 +3648,7 @@
       </p:sp>
       <p:sp>
         <p:nvSpPr>
-          <p:cNvPr id="890089800" name="Footer Placeholder 5"/>
+          <p:cNvPr id="806278505" name="Footer Placeholder 5"/>
           <p:cNvSpPr>
             <a:spLocks noGrp="1"/>
           </p:cNvSpPr>
@@ -3584,7 +3670,7 @@
       </p:sp>
       <p:sp>
         <p:nvSpPr>
-          <p:cNvPr id="1122176005" name="Slide Number Placeholder 6"/>
+          <p:cNvPr id="557764425" name="Slide Number Placeholder 6"/>
           <p:cNvSpPr>
             <a:spLocks noGrp="1"/>
           </p:cNvSpPr>
@@ -3635,7 +3721,7 @@
       </p:grpSpPr>
       <p:sp>
         <p:nvSpPr>
-          <p:cNvPr id="102594187" name="Title 1"/>
+          <p:cNvPr id="143444086" name="Title 1"/>
           <p:cNvSpPr>
             <a:spLocks noGrp="1"/>
           </p:cNvSpPr>
@@ -3670,7 +3756,7 @@
       </p:sp>
       <p:sp>
         <p:nvSpPr>
-          <p:cNvPr id="281060672" name="Picture Placeholder 2"/>
+          <p:cNvPr id="545114572" name="Picture Placeholder 2"/>
           <p:cNvSpPr>
             <a:spLocks noGrp="1"/>
           </p:cNvSpPr>
@@ -3734,7 +3820,7 @@
       </p:sp>
       <p:sp>
         <p:nvSpPr>
-          <p:cNvPr id="1619124528" name="Text Placeholder 3"/>
+          <p:cNvPr id="1451675680" name="Text Placeholder 3"/>
           <p:cNvSpPr>
             <a:spLocks noGrp="1"/>
           </p:cNvSpPr>
@@ -3802,7 +3888,7 @@
       </p:sp>
       <p:sp>
         <p:nvSpPr>
-          <p:cNvPr id="697835563" name="Date Placeholder 4"/>
+          <p:cNvPr id="1051177533" name="Date Placeholder 4"/>
           <p:cNvSpPr>
             <a:spLocks noGrp="1"/>
           </p:cNvSpPr>
@@ -3828,7 +3914,7 @@
       </p:sp>
       <p:sp>
         <p:nvSpPr>
-          <p:cNvPr id="233218339" name="Footer Placeholder 5"/>
+          <p:cNvPr id="486434939" name="Footer Placeholder 5"/>
           <p:cNvSpPr>
             <a:spLocks noGrp="1"/>
           </p:cNvSpPr>
@@ -3850,7 +3936,7 @@
       </p:sp>
       <p:sp>
         <p:nvSpPr>
-          <p:cNvPr id="141886962" name="Slide Number Placeholder 6"/>
+          <p:cNvPr id="1956976799" name="Slide Number Placeholder 6"/>
           <p:cNvSpPr>
             <a:spLocks noGrp="1"/>
           </p:cNvSpPr>
@@ -3906,7 +3992,7 @@
       </p:grpSpPr>
       <p:sp>
         <p:nvSpPr>
-          <p:cNvPr id="1625983356" name="Shape 1059"/>
+          <p:cNvPr id="1119567333" name="Shape 1059"/>
           <p:cNvSpPr>
             <a:spLocks noChangeArrowheads="1" noGrp="1"/>
           </p:cNvSpPr>
@@ -3984,7 +4070,7 @@
       </p:sp>
       <p:sp>
         <p:nvSpPr>
-          <p:cNvPr id="945980524" name="Shape 1060"/>
+          <p:cNvPr id="1052269033" name="Shape 1060"/>
           <p:cNvSpPr>
             <a:spLocks noChangeArrowheads="1" noGrp="1"/>
           </p:cNvSpPr>
@@ -4065,7 +4151,7 @@
       </p:sp>
       <p:sp>
         <p:nvSpPr>
-          <p:cNvPr id="353444028" name="Shape 1061"/>
+          <p:cNvPr id="321647990" name="Shape 1061"/>
           <p:cNvSpPr>
             <a:spLocks noChangeArrowheads="1" noGrp="1"/>
           </p:cNvSpPr>
@@ -4183,7 +4269,7 @@
       </p:sp>
       <p:sp>
         <p:nvSpPr>
-          <p:cNvPr id="1850777193" name="Title 1"/>
+          <p:cNvPr id="1339947837" name="Title 1"/>
           <p:cNvSpPr>
             <a:spLocks noGrp="1"/>
           </p:cNvSpPr>
@@ -4219,7 +4305,7 @@
       </p:sp>
       <p:sp>
         <p:nvSpPr>
-          <p:cNvPr id="388359793" name="Text Placeholder 2"/>
+          <p:cNvPr id="1476342228" name="Text Placeholder 2"/>
           <p:cNvSpPr>
             <a:spLocks noGrp="1"/>
           </p:cNvSpPr>
@@ -4295,7 +4381,7 @@
       </p:sp>
       <p:sp>
         <p:nvSpPr>
-          <p:cNvPr id="1608081792" name="Date Placeholder 3"/>
+          <p:cNvPr id="133586179" name="Date Placeholder 3"/>
           <p:cNvSpPr>
             <a:spLocks noGrp="1"/>
           </p:cNvSpPr>
@@ -4339,7 +4425,7 @@
       </p:sp>
       <p:sp>
         <p:nvSpPr>
-          <p:cNvPr id="13197149" name="Footer Placeholder 4"/>
+          <p:cNvPr id="977991082" name="Footer Placeholder 4"/>
           <p:cNvSpPr>
             <a:spLocks noGrp="1"/>
           </p:cNvSpPr>
@@ -4379,7 +4465,7 @@
       </p:sp>
       <p:sp>
         <p:nvSpPr>
-          <p:cNvPr id="559667112" name="Slide Number Placeholder 5"/>
+          <p:cNvPr id="1039425904" name="Slide Number Placeholder 5"/>
           <p:cNvSpPr>
             <a:spLocks noGrp="1"/>
           </p:cNvSpPr>
@@ -4727,7 +4813,7 @@
       </p:grpSpPr>
       <p:sp>
         <p:nvSpPr>
-          <p:cNvPr id="1310453495" name="Title 1"/>
+          <p:cNvPr id="1001896894" name="Title 1"/>
           <p:cNvSpPr>
             <a:spLocks noGrp="1"/>
           </p:cNvSpPr>
@@ -4760,7 +4846,7 @@
       </p:sp>
       <p:sp>
         <p:nvSpPr>
-          <p:cNvPr id="1360524084" name=""/>
+          <p:cNvPr id="1370261404" name=""/>
           <p:cNvSpPr txBox="1"/>
           <p:nvPr/>
         </p:nvSpPr>
@@ -5147,6 +5233,112 @@
               <a:t>Kelas D: 12 dan 19 Juni</a:t>
             </a:r>
             <a:endParaRPr sz="2800" i="0"/>
+          </a:p>
+          <a:p>
+            <a:pPr>
+              <a:defRPr/>
+            </a:pPr>
+            <a:endParaRPr sz="2800"/>
+          </a:p>
+        </p:txBody>
+      </p:sp>
+    </p:spTree>
+  </p:cSld>
+  <p:clrMapOvr>
+    <a:masterClrMapping/>
+  </p:clrMapOvr>
+  <mc:AlternateContent xmlns:mc="http://schemas.openxmlformats.org/markup-compatibility/2006">
+    <mc:Choice xmlns:p159="http://schemas.microsoft.com/office/powerpoint/2015/09/main" xmlns:p14="http://schemas.microsoft.com/office/powerpoint/2010/main" Requires="p159">
+      <p:transition p14:dur="2000" advClick="1"/>
+    </mc:Choice>
+    <mc:Fallback>
+      <p:transition advClick="1"/>
+    </mc:Fallback>
+  </mc:AlternateContent>
+</p:sld>
+</file>
+
+<file path=ppt/slides/slide4.xml><?xml version="1.0" encoding="utf-8"?>
+<p:sld xmlns:a="http://schemas.openxmlformats.org/drawingml/2006/main" xmlns:r="http://schemas.openxmlformats.org/officeDocument/2006/relationships" xmlns:p="http://schemas.openxmlformats.org/presentationml/2006/main" xmlns:m="http://schemas.openxmlformats.org/officeDocument/2006/math" xmlns:w="http://schemas.openxmlformats.org/wordprocessingml/2006/main" xmlns:mc="http://schemas.openxmlformats.org/markup-compatibility/2006" showMasterPhAnim="0" showMasterSp="1" show="1">
+  <p:cSld name="">
+    <p:spTree>
+      <p:nvGrpSpPr>
+        <p:cNvPr id="1" name=""/>
+        <p:cNvGrpSpPr/>
+        <p:nvPr/>
+      </p:nvGrpSpPr>
+      <p:grpSpPr bwMode="auto">
+        <a:xfrm>
+          <a:off x="0" y="0"/>
+          <a:ext cx="0" cy="0"/>
+          <a:chOff x="0" y="0"/>
+          <a:chExt cx="0" cy="0"/>
+        </a:xfrm>
+      </p:grpSpPr>
+      <p:sp>
+        <p:nvSpPr>
+          <p:cNvPr id="526508701" name="Title 1"/>
+          <p:cNvSpPr>
+            <a:spLocks noGrp="1"/>
+          </p:cNvSpPr>
+          <p:nvPr>
+            <p:ph type="title"/>
+          </p:nvPr>
+        </p:nvSpPr>
+        <p:spPr bwMode="auto">
+          <a:xfrm>
+            <a:off x="609598" y="328298"/>
+            <a:ext cx="10972800" cy="1143000"/>
+          </a:xfrm>
+        </p:spPr>
+        <p:txBody>
+          <a:bodyPr/>
+          <a:lstStyle/>
+          <a:p>
+            <a:pPr>
+              <a:defRPr/>
+            </a:pPr>
+            <a:r>
+              <a:rPr/>
+              <a:t>Yang dikumpulkan:</a:t>
+            </a:r>
+            <a:endParaRPr/>
+          </a:p>
+        </p:txBody>
+      </p:sp>
+      <p:sp>
+        <p:nvSpPr>
+          <p:cNvPr id="1445057598" name="Content Placeholder 2"/>
+          <p:cNvSpPr>
+            <a:spLocks noGrp="1"/>
+          </p:cNvSpPr>
+          <p:nvPr>
+            <p:ph idx="1"/>
+          </p:nvPr>
+        </p:nvSpPr>
+        <p:spPr bwMode="auto"/>
+        <p:txBody>
+          <a:bodyPr/>
+          <a:lstStyle/>
+          <a:p>
+            <a:pPr>
+              <a:defRPr/>
+            </a:pPr>
+            <a:r>
+              <a:rPr sz="2800" b="0"/>
+              <a:t>URL repository github</a:t>
+            </a:r>
+            <a:endParaRPr sz="2800" b="0"/>
+          </a:p>
+          <a:p>
+            <a:pPr>
+              <a:defRPr/>
+            </a:pPr>
+            <a:r>
+              <a:rPr sz="2800" b="0"/>
+              <a:t>Slide presentasi (PDF) disertakan dalam repository</a:t>
+            </a:r>
+            <a:endParaRPr sz="2800" b="0" i="1"/>
           </a:p>
           <a:p>
             <a:pPr>

--- a/rubrikEAS.pptx
+++ b/rubrikEAS.pptx
@@ -137,7 +137,7 @@
       </p:grpSpPr>
       <p:sp>
         <p:nvSpPr>
-          <p:cNvPr id="1908828075" name="Header Placeholder 1"/>
+          <p:cNvPr id="1931034140" name="Header Placeholder 1"/>
           <p:cNvSpPr>
             <a:spLocks noGrp="1"/>
           </p:cNvSpPr>
@@ -171,7 +171,7 @@
       </p:sp>
       <p:sp>
         <p:nvSpPr>
-          <p:cNvPr id="856498263" name="Date Placeholder 2"/>
+          <p:cNvPr id="1061701474" name="Date Placeholder 2"/>
           <p:cNvSpPr>
             <a:spLocks noGrp="1"/>
           </p:cNvSpPr>
@@ -209,7 +209,7 @@
       </p:sp>
       <p:sp>
         <p:nvSpPr>
-          <p:cNvPr id="163899093" name="Slide Image Placeholder 3"/>
+          <p:cNvPr id="541661060" name="Slide Image Placeholder 3"/>
           <p:cNvSpPr>
             <a:spLocks noChangeAspect="1" noGrp="1" noRot="1"/>
           </p:cNvSpPr>
@@ -245,7 +245,7 @@
       </p:sp>
       <p:sp>
         <p:nvSpPr>
-          <p:cNvPr id="1921484984" name="Notes Placeholder 4"/>
+          <p:cNvPr id="1101077558" name="Notes Placeholder 4"/>
           <p:cNvSpPr>
             <a:spLocks noGrp="1"/>
           </p:cNvSpPr>
@@ -319,7 +319,7 @@
       </p:sp>
       <p:sp>
         <p:nvSpPr>
-          <p:cNvPr id="1604258768" name="Footer Placeholder 5"/>
+          <p:cNvPr id="1371815817" name="Footer Placeholder 5"/>
           <p:cNvSpPr>
             <a:spLocks noGrp="1"/>
           </p:cNvSpPr>
@@ -353,7 +353,7 @@
       </p:sp>
       <p:sp>
         <p:nvSpPr>
-          <p:cNvPr id="912554745" name="Slide Number Placeholder 6"/>
+          <p:cNvPr id="1467669214" name="Slide Number Placeholder 6"/>
           <p:cNvSpPr>
             <a:spLocks noGrp="1"/>
           </p:cNvSpPr>
@@ -506,7 +506,7 @@
       </p:grpSpPr>
       <p:sp>
         <p:nvSpPr>
-          <p:cNvPr id="2124663203" name="Slide Image Placeholder 1"/>
+          <p:cNvPr id="74353225" name="Slide Image Placeholder 1"/>
           <p:cNvSpPr>
             <a:spLocks noChangeAspect="1" noGrp="1" noRot="1"/>
           </p:cNvSpPr>
@@ -523,7 +523,7 @@
       </p:sp>
       <p:sp>
         <p:nvSpPr>
-          <p:cNvPr id="996991268" name="Notes Placeholder 2"/>
+          <p:cNvPr id="1787602073" name="Notes Placeholder 2"/>
           <p:cNvSpPr>
             <a:spLocks noGrp="1"/>
           </p:cNvSpPr>
@@ -548,7 +548,7 @@
       </p:sp>
       <p:sp>
         <p:nvSpPr>
-          <p:cNvPr id="21131050" name="Slide Number Placeholder 3"/>
+          <p:cNvPr id="82921467" name="Slide Number Placeholder 3"/>
           <p:cNvSpPr>
             <a:spLocks noGrp="1"/>
           </p:cNvSpPr>
@@ -854,7 +854,7 @@
       </p:grpSpPr>
       <p:sp>
         <p:nvSpPr>
-          <p:cNvPr id="1367231634" name="Shape 1059"/>
+          <p:cNvPr id="492226531" name="Shape 1059"/>
           <p:cNvSpPr>
             <a:spLocks noChangeArrowheads="1" noGrp="1"/>
           </p:cNvSpPr>
@@ -977,7 +977,7 @@
       </p:sp>
       <p:sp>
         <p:nvSpPr>
-          <p:cNvPr id="272752381" name="Shape 1060"/>
+          <p:cNvPr id="467086527" name="Shape 1060"/>
           <p:cNvSpPr>
             <a:spLocks noChangeArrowheads="1" noGrp="1"/>
           </p:cNvSpPr>
@@ -1068,7 +1068,7 @@
       </p:sp>
       <p:sp>
         <p:nvSpPr>
-          <p:cNvPr id="466541774" name="Shape 1061"/>
+          <p:cNvPr id="797377639" name="Shape 1061"/>
           <p:cNvSpPr>
             <a:spLocks noChangeArrowheads="1" noGrp="1"/>
           </p:cNvSpPr>
@@ -1154,7 +1154,7 @@
       </p:sp>
       <p:sp>
         <p:nvSpPr>
-          <p:cNvPr id="1204906367" name="Shape 1062"/>
+          <p:cNvPr id="1787921161" name="Shape 1062"/>
           <p:cNvSpPr>
             <a:spLocks noChangeArrowheads="1" noGrp="1"/>
           </p:cNvSpPr>
@@ -1232,7 +1232,7 @@
       </p:sp>
       <p:sp>
         <p:nvSpPr>
-          <p:cNvPr id="31609557" name="Shape 1063"/>
+          <p:cNvPr id="540543905" name="Shape 1063"/>
           <p:cNvSpPr>
             <a:spLocks noChangeArrowheads="1" noGrp="1"/>
           </p:cNvSpPr>
@@ -1310,7 +1310,7 @@
       </p:sp>
       <p:sp>
         <p:nvSpPr>
-          <p:cNvPr id="1935757465" name="Subtitle 2"/>
+          <p:cNvPr id="1874032897" name="Subtitle 2"/>
           <p:cNvSpPr>
             <a:spLocks noGrp="1"/>
           </p:cNvSpPr>
@@ -1433,7 +1433,7 @@
       </p:sp>
       <p:sp>
         <p:nvSpPr>
-          <p:cNvPr id="643677007" name="Date Placeholder 3"/>
+          <p:cNvPr id="1963639736" name="Date Placeholder 3"/>
           <p:cNvSpPr>
             <a:spLocks noGrp="1"/>
           </p:cNvSpPr>
@@ -1459,7 +1459,7 @@
       </p:sp>
       <p:sp>
         <p:nvSpPr>
-          <p:cNvPr id="1561697361" name="Footer Placeholder 4"/>
+          <p:cNvPr id="914723738" name="Footer Placeholder 4"/>
           <p:cNvSpPr>
             <a:spLocks noGrp="1"/>
           </p:cNvSpPr>
@@ -1481,7 +1481,7 @@
       </p:sp>
       <p:sp>
         <p:nvSpPr>
-          <p:cNvPr id="1512260621" name="Slide Number Placeholder 5"/>
+          <p:cNvPr id="2055357087" name="Slide Number Placeholder 5"/>
           <p:cNvSpPr>
             <a:spLocks noGrp="1"/>
           </p:cNvSpPr>
@@ -1507,7 +1507,7 @@
       </p:sp>
       <p:sp>
         <p:nvSpPr>
-          <p:cNvPr id="1609655058" name="Title 6"/>
+          <p:cNvPr id="506477928" name="Title 6"/>
           <p:cNvSpPr>
             <a:spLocks noGrp="1"/>
           </p:cNvSpPr>
@@ -1567,7 +1567,7 @@
       </p:grpSpPr>
       <p:sp>
         <p:nvSpPr>
-          <p:cNvPr id="851002567" name="Title 1"/>
+          <p:cNvPr id="835605060" name="Title 1"/>
           <p:cNvSpPr>
             <a:spLocks noGrp="1"/>
           </p:cNvSpPr>
@@ -1593,7 +1593,7 @@
       </p:sp>
       <p:sp>
         <p:nvSpPr>
-          <p:cNvPr id="1818810346" name="Vertical Text Placeholder 2"/>
+          <p:cNvPr id="2098833522" name="Vertical Text Placeholder 2"/>
           <p:cNvSpPr>
             <a:spLocks noGrp="1"/>
           </p:cNvSpPr>
@@ -1659,7 +1659,7 @@
       </p:sp>
       <p:sp>
         <p:nvSpPr>
-          <p:cNvPr id="1462538837" name="Date Placeholder 3"/>
+          <p:cNvPr id="1571924921" name="Date Placeholder 3"/>
           <p:cNvSpPr>
             <a:spLocks noGrp="1"/>
           </p:cNvSpPr>
@@ -1685,7 +1685,7 @@
       </p:sp>
       <p:sp>
         <p:nvSpPr>
-          <p:cNvPr id="123434279" name="Footer Placeholder 4"/>
+          <p:cNvPr id="1997168604" name="Footer Placeholder 4"/>
           <p:cNvSpPr>
             <a:spLocks noGrp="1"/>
           </p:cNvSpPr>
@@ -1707,7 +1707,7 @@
       </p:sp>
       <p:sp>
         <p:nvSpPr>
-          <p:cNvPr id="1354579274" name="Slide Number Placeholder 5"/>
+          <p:cNvPr id="1663316802" name="Slide Number Placeholder 5"/>
           <p:cNvSpPr>
             <a:spLocks noGrp="1"/>
           </p:cNvSpPr>
@@ -1758,7 +1758,7 @@
       </p:grpSpPr>
       <p:sp>
         <p:nvSpPr>
-          <p:cNvPr id="211643653" name="Vertical Title 1"/>
+          <p:cNvPr id="368810186" name="Vertical Title 1"/>
           <p:cNvSpPr>
             <a:spLocks noGrp="1"/>
           </p:cNvSpPr>
@@ -1793,7 +1793,7 @@
       </p:sp>
       <p:sp>
         <p:nvSpPr>
-          <p:cNvPr id="1505047691" name="Vertical Text Placeholder 2"/>
+          <p:cNvPr id="1178598862" name="Vertical Text Placeholder 2"/>
           <p:cNvSpPr>
             <a:spLocks noGrp="1"/>
           </p:cNvSpPr>
@@ -1864,7 +1864,7 @@
       </p:sp>
       <p:sp>
         <p:nvSpPr>
-          <p:cNvPr id="129808902" name="Date Placeholder 3"/>
+          <p:cNvPr id="440197787" name="Date Placeholder 3"/>
           <p:cNvSpPr>
             <a:spLocks noGrp="1"/>
           </p:cNvSpPr>
@@ -1890,7 +1890,7 @@
       </p:sp>
       <p:sp>
         <p:nvSpPr>
-          <p:cNvPr id="696927262" name="Footer Placeholder 4"/>
+          <p:cNvPr id="1413663470" name="Footer Placeholder 4"/>
           <p:cNvSpPr>
             <a:spLocks noGrp="1"/>
           </p:cNvSpPr>
@@ -1912,7 +1912,7 @@
       </p:sp>
       <p:sp>
         <p:nvSpPr>
-          <p:cNvPr id="1039417192" name="Slide Number Placeholder 5"/>
+          <p:cNvPr id="45356785" name="Slide Number Placeholder 5"/>
           <p:cNvSpPr>
             <a:spLocks noGrp="1"/>
           </p:cNvSpPr>
@@ -1963,7 +1963,7 @@
       </p:grpSpPr>
       <p:sp>
         <p:nvSpPr>
-          <p:cNvPr id="930927742" name="Title 1"/>
+          <p:cNvPr id="1311342036" name="Title 1"/>
           <p:cNvSpPr>
             <a:spLocks noGrp="1"/>
           </p:cNvSpPr>
@@ -1989,7 +1989,7 @@
       </p:sp>
       <p:sp>
         <p:nvSpPr>
-          <p:cNvPr id="1514858153" name="Content Placeholder 2"/>
+          <p:cNvPr id="884943275" name="Content Placeholder 2"/>
           <p:cNvSpPr>
             <a:spLocks noGrp="1"/>
           </p:cNvSpPr>
@@ -2055,7 +2055,7 @@
       </p:sp>
       <p:sp>
         <p:nvSpPr>
-          <p:cNvPr id="1047813315" name="Date Placeholder 3"/>
+          <p:cNvPr id="1626303017" name="Date Placeholder 3"/>
           <p:cNvSpPr>
             <a:spLocks noGrp="1"/>
           </p:cNvSpPr>
@@ -2081,7 +2081,7 @@
       </p:sp>
       <p:sp>
         <p:nvSpPr>
-          <p:cNvPr id="717943188" name="Footer Placeholder 4"/>
+          <p:cNvPr id="972776608" name="Footer Placeholder 4"/>
           <p:cNvSpPr>
             <a:spLocks noGrp="1"/>
           </p:cNvSpPr>
@@ -2103,7 +2103,7 @@
       </p:sp>
       <p:sp>
         <p:nvSpPr>
-          <p:cNvPr id="1739454356" name="Slide Number Placeholder 5"/>
+          <p:cNvPr id="1629994716" name="Slide Number Placeholder 5"/>
           <p:cNvSpPr>
             <a:spLocks noGrp="1"/>
           </p:cNvSpPr>
@@ -2154,7 +2154,7 @@
       </p:grpSpPr>
       <p:sp>
         <p:nvSpPr>
-          <p:cNvPr id="1945075947" name="Title 1"/>
+          <p:cNvPr id="1492314943" name="Title 1"/>
           <p:cNvSpPr>
             <a:spLocks noGrp="1"/>
           </p:cNvSpPr>
@@ -2189,7 +2189,7 @@
       </p:sp>
       <p:sp>
         <p:nvSpPr>
-          <p:cNvPr id="1485254172" name="Text Placeholder 2"/>
+          <p:cNvPr id="1525340638" name="Text Placeholder 2"/>
           <p:cNvSpPr>
             <a:spLocks noGrp="1"/>
           </p:cNvSpPr>
@@ -2311,7 +2311,7 @@
       </p:sp>
       <p:sp>
         <p:nvSpPr>
-          <p:cNvPr id="1328944724" name="Date Placeholder 3"/>
+          <p:cNvPr id="1552357920" name="Date Placeholder 3"/>
           <p:cNvSpPr>
             <a:spLocks noGrp="1"/>
           </p:cNvSpPr>
@@ -2337,7 +2337,7 @@
       </p:sp>
       <p:sp>
         <p:nvSpPr>
-          <p:cNvPr id="2111127425" name="Footer Placeholder 4"/>
+          <p:cNvPr id="2111484324" name="Footer Placeholder 4"/>
           <p:cNvSpPr>
             <a:spLocks noGrp="1"/>
           </p:cNvSpPr>
@@ -2359,7 +2359,7 @@
       </p:sp>
       <p:sp>
         <p:nvSpPr>
-          <p:cNvPr id="515226255" name="Slide Number Placeholder 5"/>
+          <p:cNvPr id="1640878104" name="Slide Number Placeholder 5"/>
           <p:cNvSpPr>
             <a:spLocks noGrp="1"/>
           </p:cNvSpPr>
@@ -2410,7 +2410,7 @@
       </p:grpSpPr>
       <p:sp>
         <p:nvSpPr>
-          <p:cNvPr id="2008582800" name="Title 1"/>
+          <p:cNvPr id="2072855167" name="Title 1"/>
           <p:cNvSpPr>
             <a:spLocks noGrp="1"/>
           </p:cNvSpPr>
@@ -2436,7 +2436,7 @@
       </p:sp>
       <p:sp>
         <p:nvSpPr>
-          <p:cNvPr id="1081143984" name="Content Placeholder 2"/>
+          <p:cNvPr id="1982600326" name="Content Placeholder 2"/>
           <p:cNvSpPr>
             <a:spLocks noGrp="1"/>
           </p:cNvSpPr>
@@ -2535,7 +2535,7 @@
       </p:sp>
       <p:sp>
         <p:nvSpPr>
-          <p:cNvPr id="2073891956" name="Content Placeholder 3"/>
+          <p:cNvPr id="695613703" name="Content Placeholder 3"/>
           <p:cNvSpPr>
             <a:spLocks noGrp="1"/>
           </p:cNvSpPr>
@@ -2634,7 +2634,7 @@
       </p:sp>
       <p:sp>
         <p:nvSpPr>
-          <p:cNvPr id="2101577369" name="Date Placeholder 4"/>
+          <p:cNvPr id="415213263" name="Date Placeholder 4"/>
           <p:cNvSpPr>
             <a:spLocks noGrp="1"/>
           </p:cNvSpPr>
@@ -2660,7 +2660,7 @@
       </p:sp>
       <p:sp>
         <p:nvSpPr>
-          <p:cNvPr id="65186339" name="Footer Placeholder 5"/>
+          <p:cNvPr id="154134106" name="Footer Placeholder 5"/>
           <p:cNvSpPr>
             <a:spLocks noGrp="1"/>
           </p:cNvSpPr>
@@ -2682,7 +2682,7 @@
       </p:sp>
       <p:sp>
         <p:nvSpPr>
-          <p:cNvPr id="743477683" name="Slide Number Placeholder 6"/>
+          <p:cNvPr id="2132254653" name="Slide Number Placeholder 6"/>
           <p:cNvSpPr>
             <a:spLocks noGrp="1"/>
           </p:cNvSpPr>
@@ -2733,7 +2733,7 @@
       </p:grpSpPr>
       <p:sp>
         <p:nvSpPr>
-          <p:cNvPr id="1698626734" name="Title 1"/>
+          <p:cNvPr id="152596617" name="Title 1"/>
           <p:cNvSpPr>
             <a:spLocks noGrp="1"/>
           </p:cNvSpPr>
@@ -2763,7 +2763,7 @@
       </p:sp>
       <p:sp>
         <p:nvSpPr>
-          <p:cNvPr id="19922352" name="Text Placeholder 2"/>
+          <p:cNvPr id="950526143" name="Text Placeholder 2"/>
           <p:cNvSpPr>
             <a:spLocks noGrp="1"/>
           </p:cNvSpPr>
@@ -2831,7 +2831,7 @@
       </p:sp>
       <p:sp>
         <p:nvSpPr>
-          <p:cNvPr id="818277888" name="Content Placeholder 3"/>
+          <p:cNvPr id="1751930485" name="Content Placeholder 3"/>
           <p:cNvSpPr>
             <a:spLocks noGrp="1"/>
           </p:cNvSpPr>
@@ -2930,7 +2930,7 @@
       </p:sp>
       <p:sp>
         <p:nvSpPr>
-          <p:cNvPr id="1089565616" name="Text Placeholder 4"/>
+          <p:cNvPr id="1507467750" name="Text Placeholder 4"/>
           <p:cNvSpPr>
             <a:spLocks noGrp="1"/>
           </p:cNvSpPr>
@@ -2998,7 +2998,7 @@
       </p:sp>
       <p:sp>
         <p:nvSpPr>
-          <p:cNvPr id="968068089" name="Content Placeholder 5"/>
+          <p:cNvPr id="212602353" name="Content Placeholder 5"/>
           <p:cNvSpPr>
             <a:spLocks noGrp="1"/>
           </p:cNvSpPr>
@@ -3097,7 +3097,7 @@
       </p:sp>
       <p:sp>
         <p:nvSpPr>
-          <p:cNvPr id="1344643127" name="Date Placeholder 6"/>
+          <p:cNvPr id="426103803" name="Date Placeholder 6"/>
           <p:cNvSpPr>
             <a:spLocks noGrp="1"/>
           </p:cNvSpPr>
@@ -3123,7 +3123,7 @@
       </p:sp>
       <p:sp>
         <p:nvSpPr>
-          <p:cNvPr id="674207531" name="Footer Placeholder 7"/>
+          <p:cNvPr id="1253260223" name="Footer Placeholder 7"/>
           <p:cNvSpPr>
             <a:spLocks noGrp="1"/>
           </p:cNvSpPr>
@@ -3145,7 +3145,7 @@
       </p:sp>
       <p:sp>
         <p:nvSpPr>
-          <p:cNvPr id="1139016621" name="Slide Number Placeholder 8"/>
+          <p:cNvPr id="1370658520" name="Slide Number Placeholder 8"/>
           <p:cNvSpPr>
             <a:spLocks noGrp="1"/>
           </p:cNvSpPr>
@@ -3196,7 +3196,7 @@
       </p:grpSpPr>
       <p:sp>
         <p:nvSpPr>
-          <p:cNvPr id="763987756" name="Title 1"/>
+          <p:cNvPr id="122069104" name="Title 1"/>
           <p:cNvSpPr>
             <a:spLocks noGrp="1"/>
           </p:cNvSpPr>
@@ -3222,7 +3222,7 @@
       </p:sp>
       <p:sp>
         <p:nvSpPr>
-          <p:cNvPr id="330059104" name="Date Placeholder 2"/>
+          <p:cNvPr id="853868173" name="Date Placeholder 2"/>
           <p:cNvSpPr>
             <a:spLocks noGrp="1"/>
           </p:cNvSpPr>
@@ -3248,7 +3248,7 @@
       </p:sp>
       <p:sp>
         <p:nvSpPr>
-          <p:cNvPr id="851847564" name="Footer Placeholder 3"/>
+          <p:cNvPr id="214659625" name="Footer Placeholder 3"/>
           <p:cNvSpPr>
             <a:spLocks noGrp="1"/>
           </p:cNvSpPr>
@@ -3270,7 +3270,7 @@
       </p:sp>
       <p:sp>
         <p:nvSpPr>
-          <p:cNvPr id="1285181261" name="Slide Number Placeholder 4"/>
+          <p:cNvPr id="63527867" name="Slide Number Placeholder 4"/>
           <p:cNvSpPr>
             <a:spLocks noGrp="1"/>
           </p:cNvSpPr>
@@ -3321,7 +3321,7 @@
       </p:grpSpPr>
       <p:sp>
         <p:nvSpPr>
-          <p:cNvPr id="1723059132" name="Date Placeholder 1"/>
+          <p:cNvPr id="1473826622" name="Date Placeholder 1"/>
           <p:cNvSpPr>
             <a:spLocks noGrp="1"/>
           </p:cNvSpPr>
@@ -3347,7 +3347,7 @@
       </p:sp>
       <p:sp>
         <p:nvSpPr>
-          <p:cNvPr id="646910622" name="Footer Placeholder 2"/>
+          <p:cNvPr id="1520510816" name="Footer Placeholder 2"/>
           <p:cNvSpPr>
             <a:spLocks noGrp="1"/>
           </p:cNvSpPr>
@@ -3369,7 +3369,7 @@
       </p:sp>
       <p:sp>
         <p:nvSpPr>
-          <p:cNvPr id="245649872" name="Slide Number Placeholder 3"/>
+          <p:cNvPr id="999204304" name="Slide Number Placeholder 3"/>
           <p:cNvSpPr>
             <a:spLocks noGrp="1"/>
           </p:cNvSpPr>
@@ -3420,7 +3420,7 @@
       </p:grpSpPr>
       <p:sp>
         <p:nvSpPr>
-          <p:cNvPr id="1232506182" name="Title 1"/>
+          <p:cNvPr id="365753394" name="Title 1"/>
           <p:cNvSpPr>
             <a:spLocks noGrp="1"/>
           </p:cNvSpPr>
@@ -3455,7 +3455,7 @@
       </p:sp>
       <p:sp>
         <p:nvSpPr>
-          <p:cNvPr id="998794422" name="Content Placeholder 2"/>
+          <p:cNvPr id="773652364" name="Content Placeholder 2"/>
           <p:cNvSpPr>
             <a:spLocks noGrp="1"/>
           </p:cNvSpPr>
@@ -3554,7 +3554,7 @@
       </p:sp>
       <p:sp>
         <p:nvSpPr>
-          <p:cNvPr id="302889392" name="Text Placeholder 3"/>
+          <p:cNvPr id="1675936273" name="Text Placeholder 3"/>
           <p:cNvSpPr>
             <a:spLocks noGrp="1"/>
           </p:cNvSpPr>
@@ -3622,7 +3622,7 @@
       </p:sp>
       <p:sp>
         <p:nvSpPr>
-          <p:cNvPr id="230946611" name="Date Placeholder 4"/>
+          <p:cNvPr id="471306019" name="Date Placeholder 4"/>
           <p:cNvSpPr>
             <a:spLocks noGrp="1"/>
           </p:cNvSpPr>
@@ -3648,7 +3648,7 @@
       </p:sp>
       <p:sp>
         <p:nvSpPr>
-          <p:cNvPr id="806278505" name="Footer Placeholder 5"/>
+          <p:cNvPr id="79099546" name="Footer Placeholder 5"/>
           <p:cNvSpPr>
             <a:spLocks noGrp="1"/>
           </p:cNvSpPr>
@@ -3670,7 +3670,7 @@
       </p:sp>
       <p:sp>
         <p:nvSpPr>
-          <p:cNvPr id="557764425" name="Slide Number Placeholder 6"/>
+          <p:cNvPr id="2025834329" name="Slide Number Placeholder 6"/>
           <p:cNvSpPr>
             <a:spLocks noGrp="1"/>
           </p:cNvSpPr>
@@ -3721,7 +3721,7 @@
       </p:grpSpPr>
       <p:sp>
         <p:nvSpPr>
-          <p:cNvPr id="143444086" name="Title 1"/>
+          <p:cNvPr id="210898227" name="Title 1"/>
           <p:cNvSpPr>
             <a:spLocks noGrp="1"/>
           </p:cNvSpPr>
@@ -3756,7 +3756,7 @@
       </p:sp>
       <p:sp>
         <p:nvSpPr>
-          <p:cNvPr id="545114572" name="Picture Placeholder 2"/>
+          <p:cNvPr id="920260453" name="Picture Placeholder 2"/>
           <p:cNvSpPr>
             <a:spLocks noGrp="1"/>
           </p:cNvSpPr>
@@ -3820,7 +3820,7 @@
       </p:sp>
       <p:sp>
         <p:nvSpPr>
-          <p:cNvPr id="1451675680" name="Text Placeholder 3"/>
+          <p:cNvPr id="1611927592" name="Text Placeholder 3"/>
           <p:cNvSpPr>
             <a:spLocks noGrp="1"/>
           </p:cNvSpPr>
@@ -3888,7 +3888,7 @@
       </p:sp>
       <p:sp>
         <p:nvSpPr>
-          <p:cNvPr id="1051177533" name="Date Placeholder 4"/>
+          <p:cNvPr id="1404729498" name="Date Placeholder 4"/>
           <p:cNvSpPr>
             <a:spLocks noGrp="1"/>
           </p:cNvSpPr>
@@ -3914,7 +3914,7 @@
       </p:sp>
       <p:sp>
         <p:nvSpPr>
-          <p:cNvPr id="486434939" name="Footer Placeholder 5"/>
+          <p:cNvPr id="400777171" name="Footer Placeholder 5"/>
           <p:cNvSpPr>
             <a:spLocks noGrp="1"/>
           </p:cNvSpPr>
@@ -3936,7 +3936,7 @@
       </p:sp>
       <p:sp>
         <p:nvSpPr>
-          <p:cNvPr id="1956976799" name="Slide Number Placeholder 6"/>
+          <p:cNvPr id="938998059" name="Slide Number Placeholder 6"/>
           <p:cNvSpPr>
             <a:spLocks noGrp="1"/>
           </p:cNvSpPr>
@@ -3992,7 +3992,7 @@
       </p:grpSpPr>
       <p:sp>
         <p:nvSpPr>
-          <p:cNvPr id="1119567333" name="Shape 1059"/>
+          <p:cNvPr id="2094833788" name="Shape 1059"/>
           <p:cNvSpPr>
             <a:spLocks noChangeArrowheads="1" noGrp="1"/>
           </p:cNvSpPr>
@@ -4070,7 +4070,7 @@
       </p:sp>
       <p:sp>
         <p:nvSpPr>
-          <p:cNvPr id="1052269033" name="Shape 1060"/>
+          <p:cNvPr id="1668850059" name="Shape 1060"/>
           <p:cNvSpPr>
             <a:spLocks noChangeArrowheads="1" noGrp="1"/>
           </p:cNvSpPr>
@@ -4151,7 +4151,7 @@
       </p:sp>
       <p:sp>
         <p:nvSpPr>
-          <p:cNvPr id="321647990" name="Shape 1061"/>
+          <p:cNvPr id="1575721117" name="Shape 1061"/>
           <p:cNvSpPr>
             <a:spLocks noChangeArrowheads="1" noGrp="1"/>
           </p:cNvSpPr>
@@ -4269,7 +4269,7 @@
       </p:sp>
       <p:sp>
         <p:nvSpPr>
-          <p:cNvPr id="1339947837" name="Title 1"/>
+          <p:cNvPr id="1891096509" name="Title 1"/>
           <p:cNvSpPr>
             <a:spLocks noGrp="1"/>
           </p:cNvSpPr>
@@ -4305,7 +4305,7 @@
       </p:sp>
       <p:sp>
         <p:nvSpPr>
-          <p:cNvPr id="1476342228" name="Text Placeholder 2"/>
+          <p:cNvPr id="680333574" name="Text Placeholder 2"/>
           <p:cNvSpPr>
             <a:spLocks noGrp="1"/>
           </p:cNvSpPr>
@@ -4381,7 +4381,7 @@
       </p:sp>
       <p:sp>
         <p:nvSpPr>
-          <p:cNvPr id="133586179" name="Date Placeholder 3"/>
+          <p:cNvPr id="560950386" name="Date Placeholder 3"/>
           <p:cNvSpPr>
             <a:spLocks noGrp="1"/>
           </p:cNvSpPr>
@@ -4425,7 +4425,7 @@
       </p:sp>
       <p:sp>
         <p:nvSpPr>
-          <p:cNvPr id="977991082" name="Footer Placeholder 4"/>
+          <p:cNvPr id="76082055" name="Footer Placeholder 4"/>
           <p:cNvSpPr>
             <a:spLocks noGrp="1"/>
           </p:cNvSpPr>
@@ -4465,7 +4465,7 @@
       </p:sp>
       <p:sp>
         <p:nvSpPr>
-          <p:cNvPr id="1039425904" name="Slide Number Placeholder 5"/>
+          <p:cNvPr id="2044972858" name="Slide Number Placeholder 5"/>
           <p:cNvSpPr>
             <a:spLocks noGrp="1"/>
           </p:cNvSpPr>
@@ -4813,7 +4813,7 @@
       </p:grpSpPr>
       <p:sp>
         <p:nvSpPr>
-          <p:cNvPr id="1001896894" name="Title 1"/>
+          <p:cNvPr id="1283338548" name="Title 1"/>
           <p:cNvSpPr>
             <a:spLocks noGrp="1"/>
           </p:cNvSpPr>
@@ -4846,7 +4846,7 @@
       </p:sp>
       <p:sp>
         <p:nvSpPr>
-          <p:cNvPr id="1370261404" name=""/>
+          <p:cNvPr id="1329495596" name=""/>
           <p:cNvSpPr txBox="1"/>
           <p:nvPr/>
         </p:nvSpPr>
@@ -5130,31 +5130,32 @@
             <p:ph idx="1"/>
           </p:nvPr>
         </p:nvSpPr>
-        <p:spPr bwMode="auto"/>
+        <p:spPr bwMode="auto">
+          <a:xfrm>
+            <a:off x="542521" y="1734355"/>
+            <a:ext cx="10972800" cy="4525961"/>
+          </a:xfrm>
+        </p:spPr>
         <p:txBody>
           <a:bodyPr vertOverflow="overflow" horzOverflow="overflow" vert="horz" wrap="square" lIns="91440" tIns="45720" rIns="91440" bIns="45720" numCol="1" spcCol="0" rtlCol="0" fromWordArt="0" anchor="t" anchorCtr="0" forceAA="0" upright="0" compatLnSpc="0">
             <a:normAutofit/>
           </a:bodyPr>
           <a:lstStyle/>
           <a:p>
-            <a:pPr marL="0" indent="0">
-              <a:buFont typeface="Arial"/>
-              <a:buNone/>
-              <a:defRPr/>
-            </a:pPr>
-            <a:r>
-              <a:rPr sz="2800"/>
-              <a:t>Masing-masing 10%:</a:t>
-            </a:r>
-            <a:endParaRPr sz="2800"/>
-          </a:p>
-          <a:p>
             <a:pPr>
               <a:defRPr/>
             </a:pPr>
             <a:r>
               <a:rPr sz="2800" b="0"/>
-              <a:t>Github commit history (tiap member berkontribusi, tidak </a:t>
+              <a:t>12 poin: Github commit history (</a:t>
+            </a:r>
+            <a:r>
+              <a:rPr sz="2800" b="1"/>
+              <a:t>tiap member berkontribusi</a:t>
+            </a:r>
+            <a:r>
+              <a:rPr sz="2800" b="0"/>
+              <a:t>, tidak </a:t>
             </a:r>
             <a:r>
               <a:rPr sz="2800" b="0" i="1"/>
@@ -5170,17 +5171,21 @@
             </a:r>
             <a:r>
               <a:rPr sz="2800" b="0" i="1"/>
-              <a:t>)</a:t>
-            </a:r>
-            <a:endParaRPr sz="2800" b="0" i="1"/>
-          </a:p>
-          <a:p>
-            <a:pPr>
-              <a:defRPr/>
-            </a:pPr>
+              <a:t>); </a:t>
+            </a:r>
             <a:r>
               <a:rPr sz="2800" b="0" i="0"/>
-              <a:t>Potensi atau komitmen diteruskan untuk penelitian lebih lanjut</a:t>
+              <a:t>diambil sebagai nilai individu</a:t>
+            </a:r>
+            <a:endParaRPr sz="2800" b="0" i="0"/>
+          </a:p>
+          <a:p>
+            <a:pPr>
+              <a:defRPr/>
+            </a:pPr>
+            <a:r>
+              <a:rPr sz="2800" b="0" i="0"/>
+              <a:t>8 poin: Potensi atau komitmen diteruskan untuk penelitian lebih lanjut</a:t>
             </a:r>
             <a:r>
               <a:rPr sz="2800" i="0"/>
@@ -5338,7 +5343,7 @@
               <a:rPr sz="2800" b="0"/>
               <a:t>Slide presentasi (PDF) disertakan dalam repository</a:t>
             </a:r>
-            <a:endParaRPr sz="2800" b="0" i="1"/>
+            <a:endParaRPr sz="2800" b="1" i="0"/>
           </a:p>
           <a:p>
             <a:pPr>
